--- a/Zajecia 2 - Tworzenie badania/Tworzenie badania.pptx
+++ b/Zajecia 2 - Tworzenie badania/Tworzenie badania.pptx
@@ -13,18 +13,18 @@
     <p:sldId id="259" r:id="rId4"/>
     <p:sldId id="260" r:id="rId5"/>
     <p:sldId id="258" r:id="rId6"/>
-    <p:sldId id="266" r:id="rId7"/>
-    <p:sldId id="262" r:id="rId8"/>
-    <p:sldId id="261" r:id="rId9"/>
-    <p:sldId id="263" r:id="rId10"/>
-    <p:sldId id="264" r:id="rId11"/>
-    <p:sldId id="268" r:id="rId12"/>
-    <p:sldId id="265" r:id="rId13"/>
-    <p:sldId id="269" r:id="rId14"/>
-    <p:sldId id="272" r:id="rId15"/>
-    <p:sldId id="270" r:id="rId16"/>
-    <p:sldId id="271" r:id="rId17"/>
-    <p:sldId id="273" r:id="rId18"/>
+    <p:sldId id="262" r:id="rId7"/>
+    <p:sldId id="261" r:id="rId8"/>
+    <p:sldId id="263" r:id="rId9"/>
+    <p:sldId id="264" r:id="rId10"/>
+    <p:sldId id="268" r:id="rId11"/>
+    <p:sldId id="265" r:id="rId12"/>
+    <p:sldId id="269" r:id="rId13"/>
+    <p:sldId id="272" r:id="rId14"/>
+    <p:sldId id="270" r:id="rId15"/>
+    <p:sldId id="271" r:id="rId16"/>
+    <p:sldId id="273" r:id="rId17"/>
+    <p:sldId id="266" r:id="rId18"/>
   </p:sldIdLst>
   <p:sldSz cx="12192000" cy="6858000"/>
   <p:notesSz cx="6858000" cy="9144000"/>
@@ -137,7 +137,6 @@
             <p14:sldId id="259"/>
             <p14:sldId id="260"/>
             <p14:sldId id="258"/>
-            <p14:sldId id="266"/>
           </p14:sldIdLst>
         </p14:section>
         <p14:section name="Przygotowanie literatury" id="{61FEF0C0-A9F5-4B8A-981F-90EE736C6B56}">
@@ -157,6 +156,7 @@
             <p14:sldId id="270"/>
             <p14:sldId id="271"/>
             <p14:sldId id="273"/>
+            <p14:sldId id="266"/>
           </p14:sldIdLst>
         </p14:section>
       </p14:sectionLst>
@@ -172,11 +172,18 @@
 <pc:chgInfo xmlns:a="http://schemas.openxmlformats.org/drawingml/2006/main" xmlns:r="http://schemas.openxmlformats.org/officeDocument/2006/relationships" xmlns:ac="http://schemas.microsoft.com/office/drawing/2013/main/command" xmlns:pc="http://schemas.microsoft.com/office/powerpoint/2013/main/command">
   <pc:docChgLst>
     <pc:chgData name="Jakub Rybacki" userId="71160f026d85cc38" providerId="LiveId" clId="{14D74CA5-8197-461F-A400-C30D2CB52B76}"/>
-    <pc:docChg chg="custSel addSld modSld modSection">
-      <pc:chgData name="Jakub Rybacki" userId="71160f026d85cc38" providerId="LiveId" clId="{14D74CA5-8197-461F-A400-C30D2CB52B76}" dt="2022-10-13T06:55:40.314" v="244" actId="20577"/>
+    <pc:docChg chg="custSel addSld modSld sldOrd modSection">
+      <pc:chgData name="Jakub Rybacki" userId="71160f026d85cc38" providerId="LiveId" clId="{14D74CA5-8197-461F-A400-C30D2CB52B76}" dt="2022-10-13T14:28:55.537" v="246"/>
       <pc:docMkLst>
         <pc:docMk/>
       </pc:docMkLst>
+      <pc:sldChg chg="ord">
+        <pc:chgData name="Jakub Rybacki" userId="71160f026d85cc38" providerId="LiveId" clId="{14D74CA5-8197-461F-A400-C30D2CB52B76}" dt="2022-10-13T14:28:55.537" v="246"/>
+        <pc:sldMkLst>
+          <pc:docMk/>
+          <pc:sldMk cId="2185680157" sldId="266"/>
+        </pc:sldMkLst>
+      </pc:sldChg>
       <pc:sldChg chg="addSp modSp mod setBg">
         <pc:chgData name="Jakub Rybacki" userId="71160f026d85cc38" providerId="LiveId" clId="{14D74CA5-8197-461F-A400-C30D2CB52B76}" dt="2022-10-13T06:54:02.845" v="0" actId="26606"/>
         <pc:sldMkLst>
@@ -21259,237 +21266,6 @@
 <file path=ppt/slides/slide10.xml><?xml version="1.0" encoding="utf-8"?>
 <p:sld xmlns:a="http://schemas.openxmlformats.org/drawingml/2006/main" xmlns:r="http://schemas.openxmlformats.org/officeDocument/2006/relationships" xmlns:p="http://schemas.openxmlformats.org/presentationml/2006/main">
   <p:cSld>
-    <p:bg>
-      <p:bgPr>
-        <a:solidFill>
-          <a:schemeClr val="bg1"/>
-        </a:solidFill>
-        <a:effectLst/>
-      </p:bgPr>
-    </p:bg>
-    <p:spTree>
-      <p:nvGrpSpPr>
-        <p:cNvPr id="1" name=""/>
-        <p:cNvGrpSpPr/>
-        <p:nvPr/>
-      </p:nvGrpSpPr>
-      <p:grpSpPr>
-        <a:xfrm>
-          <a:off x="0" y="0"/>
-          <a:ext cx="0" cy="0"/>
-          <a:chOff x="0" y="0"/>
-          <a:chExt cx="0" cy="0"/>
-        </a:xfrm>
-      </p:grpSpPr>
-      <p:cxnSp>
-        <p:nvCxnSpPr>
-          <p:cNvPr id="7" name="Straight Connector 7">
-            <a:extLst>
-              <a:ext uri="{FF2B5EF4-FFF2-40B4-BE49-F238E27FC236}">
-                <a16:creationId xmlns:a16="http://schemas.microsoft.com/office/drawing/2014/main" id="{0B5F7E3B-C5F1-40E0-A491-558BAFBC1127}"/>
-              </a:ext>
-              <a:ext uri="{C183D7F6-B498-43B3-948B-1728B52AA6E4}">
-                <adec:decorative xmlns:adec="http://schemas.microsoft.com/office/drawing/2017/decorative" val="1"/>
-              </a:ext>
-            </a:extLst>
-          </p:cNvPr>
-          <p:cNvCxnSpPr>
-            <a:cxnSpLocks noGrp="1" noRot="1" noChangeAspect="1" noMove="1" noResize="1" noEditPoints="1" noAdjustHandles="1" noChangeArrowheads="1" noChangeShapeType="1"/>
-          </p:cNvCxnSpPr>
-          <p:nvPr>
-            <p:extLst>
-              <p:ext uri="{386F3935-93C4-4BCD-93E2-E3B085C9AB24}">
-                <p16:designElem xmlns:p16="http://schemas.microsoft.com/office/powerpoint/2015/main" val="1"/>
-              </p:ext>
-            </p:extLst>
-          </p:nvPr>
-        </p:nvCxnSpPr>
-        <p:spPr>
-          <a:xfrm>
-            <a:off x="4241804" y="1460500"/>
-            <a:ext cx="0" cy="3937000"/>
-          </a:xfrm>
-          <a:prstGeom prst="line">
-            <a:avLst/>
-          </a:prstGeom>
-        </p:spPr>
-        <p:style>
-          <a:lnRef idx="1">
-            <a:schemeClr val="accent1"/>
-          </a:lnRef>
-          <a:fillRef idx="0">
-            <a:schemeClr val="accent1"/>
-          </a:fillRef>
-          <a:effectRef idx="0">
-            <a:schemeClr val="accent1"/>
-          </a:effectRef>
-          <a:fontRef idx="minor">
-            <a:schemeClr val="tx1"/>
-          </a:fontRef>
-        </p:style>
-      </p:cxnSp>
-      <p:sp>
-        <p:nvSpPr>
-          <p:cNvPr id="2" name="Title 1">
-            <a:extLst>
-              <a:ext uri="{FF2B5EF4-FFF2-40B4-BE49-F238E27FC236}">
-                <a16:creationId xmlns:a16="http://schemas.microsoft.com/office/drawing/2014/main" id="{C0798C81-2215-EF97-F327-23A295E10C9A}"/>
-              </a:ext>
-            </a:extLst>
-          </p:cNvPr>
-          <p:cNvSpPr>
-            <a:spLocks noGrp="1"/>
-          </p:cNvSpPr>
-          <p:nvPr>
-            <p:ph type="title"/>
-          </p:nvPr>
-        </p:nvSpPr>
-        <p:spPr>
-          <a:xfrm>
-            <a:off x="643467" y="816638"/>
-            <a:ext cx="3367359" cy="5224724"/>
-          </a:xfrm>
-        </p:spPr>
-        <p:txBody>
-          <a:bodyPr anchor="ctr">
-            <a:normAutofit/>
-          </a:bodyPr>
-          <a:lstStyle/>
-          <a:p>
-            <a:r>
-              <a:rPr lang="pl-PL" dirty="0"/>
-              <a:t>Kilka pojęć – Peer </a:t>
-            </a:r>
-            <a:r>
-              <a:rPr lang="pl-PL" dirty="0" err="1"/>
-              <a:t>review</a:t>
-            </a:r>
-            <a:endParaRPr lang="en-GB" dirty="0"/>
-          </a:p>
-        </p:txBody>
-      </p:sp>
-      <p:sp>
-        <p:nvSpPr>
-          <p:cNvPr id="3" name="Content Placeholder 2">
-            <a:extLst>
-              <a:ext uri="{FF2B5EF4-FFF2-40B4-BE49-F238E27FC236}">
-                <a16:creationId xmlns:a16="http://schemas.microsoft.com/office/drawing/2014/main" id="{954F91D3-AD00-F500-F17B-145463EC10E8}"/>
-              </a:ext>
-            </a:extLst>
-          </p:cNvPr>
-          <p:cNvSpPr>
-            <a:spLocks noGrp="1"/>
-          </p:cNvSpPr>
-          <p:nvPr>
-            <p:ph idx="1"/>
-          </p:nvPr>
-        </p:nvSpPr>
-        <p:spPr>
-          <a:xfrm>
-            <a:off x="4654295" y="816638"/>
-            <a:ext cx="4619706" cy="5224724"/>
-          </a:xfrm>
-        </p:spPr>
-        <p:txBody>
-          <a:bodyPr anchor="ctr">
-            <a:normAutofit/>
-          </a:bodyPr>
-          <a:lstStyle/>
-          <a:p>
-            <a:r>
-              <a:rPr lang="pl-PL" dirty="0"/>
-              <a:t>To proces recenzji </a:t>
-            </a:r>
-            <a:r>
-              <a:rPr lang="pl-PL" i="1" dirty="0" err="1"/>
-              <a:t>Working</a:t>
-            </a:r>
-            <a:r>
-              <a:rPr lang="pl-PL" i="1" dirty="0"/>
-              <a:t> Paper</a:t>
-            </a:r>
-          </a:p>
-          <a:p>
-            <a:pPr lvl="1"/>
-            <a:r>
-              <a:rPr lang="pl-PL" dirty="0"/>
-              <a:t>Badanie oceniane przez 2-3 osoby </a:t>
-            </a:r>
-          </a:p>
-          <a:p>
-            <a:pPr lvl="1"/>
-            <a:r>
-              <a:rPr lang="pl-PL" dirty="0"/>
-              <a:t>Oceniający są anonimowi, autor nie.</a:t>
-            </a:r>
-          </a:p>
-          <a:p>
-            <a:pPr lvl="1"/>
-            <a:endParaRPr lang="pl-PL" dirty="0"/>
-          </a:p>
-          <a:p>
-            <a:r>
-              <a:rPr lang="pl-PL" dirty="0"/>
-              <a:t> Ciekawe teksty (ang.):</a:t>
-            </a:r>
-          </a:p>
-          <a:p>
-            <a:pPr lvl="1"/>
-            <a:r>
-              <a:rPr lang="pl-PL" dirty="0">
-                <a:hlinkClick r:id="rId2"/>
-              </a:rPr>
-              <a:t>Publishing as a </a:t>
-            </a:r>
-            <a:r>
-              <a:rPr lang="pl-PL" dirty="0" err="1">
-                <a:hlinkClick r:id="rId2"/>
-              </a:rPr>
-              <a:t>prostitution</a:t>
-            </a:r>
-            <a:r>
-              <a:rPr lang="pl-PL" dirty="0"/>
-              <a:t> – dużo o różnych bodźcach motywacyjnych</a:t>
-            </a:r>
-          </a:p>
-          <a:p>
-            <a:pPr lvl="1"/>
-            <a:r>
-              <a:rPr lang="pl-PL" dirty="0" err="1"/>
-              <a:t>Affiliation</a:t>
-            </a:r>
-            <a:r>
-              <a:rPr lang="pl-PL" dirty="0"/>
-              <a:t> </a:t>
-            </a:r>
-            <a:r>
-              <a:rPr lang="pl-PL" dirty="0" err="1"/>
-              <a:t>matters</a:t>
-            </a:r>
-            <a:r>
-              <a:rPr lang="pl-PL" dirty="0"/>
-              <a:t> – prestiżowy uniwersytet dużo znaczy. </a:t>
-            </a:r>
-            <a:endParaRPr lang="en-GB" dirty="0"/>
-          </a:p>
-        </p:txBody>
-      </p:sp>
-    </p:spTree>
-    <p:extLst>
-      <p:ext uri="{BB962C8B-B14F-4D97-AF65-F5344CB8AC3E}">
-        <p14:creationId xmlns:p14="http://schemas.microsoft.com/office/powerpoint/2010/main" val="3161942473"/>
-      </p:ext>
-    </p:extLst>
-  </p:cSld>
-  <p:clrMapOvr>
-    <a:masterClrMapping/>
-  </p:clrMapOvr>
-</p:sld>
-</file>
-
-<file path=ppt/slides/slide11.xml><?xml version="1.0" encoding="utf-8"?>
-<p:sld xmlns:a="http://schemas.openxmlformats.org/drawingml/2006/main" xmlns:r="http://schemas.openxmlformats.org/officeDocument/2006/relationships" xmlns:p="http://schemas.openxmlformats.org/presentationml/2006/main">
-  <p:cSld>
     <p:spTree>
       <p:nvGrpSpPr>
         <p:cNvPr id="1" name=""/>
@@ -21678,7 +21454,7 @@
 </p:sld>
 </file>
 
-<file path=ppt/slides/slide12.xml><?xml version="1.0" encoding="utf-8"?>
+<file path=ppt/slides/slide11.xml><?xml version="1.0" encoding="utf-8"?>
 <p:sld xmlns:a="http://schemas.openxmlformats.org/drawingml/2006/main" xmlns:r="http://schemas.openxmlformats.org/officeDocument/2006/relationships" xmlns:p="http://schemas.openxmlformats.org/presentationml/2006/main">
   <p:cSld>
     <p:bg>
@@ -21959,7 +21735,7 @@
 </p:sld>
 </file>
 
-<file path=ppt/slides/slide13.xml><?xml version="1.0" encoding="utf-8"?>
+<file path=ppt/slides/slide12.xml><?xml version="1.0" encoding="utf-8"?>
 <p:sld xmlns:a="http://schemas.openxmlformats.org/drawingml/2006/main" xmlns:r="http://schemas.openxmlformats.org/officeDocument/2006/relationships" xmlns:p="http://schemas.openxmlformats.org/presentationml/2006/main">
   <p:cSld>
     <p:spTree>
@@ -22043,7 +21819,7 @@
 </p:sld>
 </file>
 
-<file path=ppt/slides/slide14.xml><?xml version="1.0" encoding="utf-8"?>
+<file path=ppt/slides/slide13.xml><?xml version="1.0" encoding="utf-8"?>
 <p:sld xmlns:a="http://schemas.openxmlformats.org/drawingml/2006/main" xmlns:r="http://schemas.openxmlformats.org/officeDocument/2006/relationships" xmlns:p="http://schemas.openxmlformats.org/presentationml/2006/main">
   <p:cSld>
     <p:bg>
@@ -22296,7 +22072,7 @@
 </p:sld>
 </file>
 
-<file path=ppt/slides/slide15.xml><?xml version="1.0" encoding="utf-8"?>
+<file path=ppt/slides/slide14.xml><?xml version="1.0" encoding="utf-8"?>
 <p:sld xmlns:a="http://schemas.openxmlformats.org/drawingml/2006/main" xmlns:r="http://schemas.openxmlformats.org/officeDocument/2006/relationships" xmlns:p="http://schemas.openxmlformats.org/presentationml/2006/main">
   <p:cSld>
     <p:bg>
@@ -22627,7 +22403,7 @@
 </p:sld>
 </file>
 
-<file path=ppt/slides/slide16.xml><?xml version="1.0" encoding="utf-8"?>
+<file path=ppt/slides/slide15.xml><?xml version="1.0" encoding="utf-8"?>
 <p:sld xmlns:a="http://schemas.openxmlformats.org/drawingml/2006/main" xmlns:r="http://schemas.openxmlformats.org/officeDocument/2006/relationships" xmlns:p="http://schemas.openxmlformats.org/presentationml/2006/main">
   <p:cSld>
     <p:bg>
@@ -22867,7 +22643,7 @@
 </p:sld>
 </file>
 
-<file path=ppt/slides/slide17.xml><?xml version="1.0" encoding="utf-8"?>
+<file path=ppt/slides/slide16.xml><?xml version="1.0" encoding="utf-8"?>
 <p:sld xmlns:a="http://schemas.openxmlformats.org/drawingml/2006/main" xmlns:r="http://schemas.openxmlformats.org/officeDocument/2006/relationships" xmlns:p="http://schemas.openxmlformats.org/presentationml/2006/main">
   <p:cSld>
     <p:bg>
@@ -23116,6 +22892,1524 @@
     <p:extLst>
       <p:ext uri="{BB962C8B-B14F-4D97-AF65-F5344CB8AC3E}">
         <p14:creationId xmlns:p14="http://schemas.microsoft.com/office/powerpoint/2010/main" val="3146005276"/>
+      </p:ext>
+    </p:extLst>
+  </p:cSld>
+  <p:clrMapOvr>
+    <a:masterClrMapping/>
+  </p:clrMapOvr>
+</p:sld>
+</file>
+
+<file path=ppt/slides/slide17.xml><?xml version="1.0" encoding="utf-8"?>
+<p:sld xmlns:a="http://schemas.openxmlformats.org/drawingml/2006/main" xmlns:r="http://schemas.openxmlformats.org/officeDocument/2006/relationships" xmlns:p="http://schemas.openxmlformats.org/presentationml/2006/main">
+  <p:cSld>
+    <p:bg>
+      <p:bgPr>
+        <a:solidFill>
+          <a:schemeClr val="bg1"/>
+        </a:solidFill>
+        <a:effectLst/>
+      </p:bgPr>
+    </p:bg>
+    <p:spTree>
+      <p:nvGrpSpPr>
+        <p:cNvPr id="1" name=""/>
+        <p:cNvGrpSpPr/>
+        <p:nvPr/>
+      </p:nvGrpSpPr>
+      <p:grpSpPr>
+        <a:xfrm>
+          <a:off x="0" y="0"/>
+          <a:ext cx="0" cy="0"/>
+          <a:chOff x="0" y="0"/>
+          <a:chExt cx="0" cy="0"/>
+        </a:xfrm>
+      </p:grpSpPr>
+      <p:grpSp>
+        <p:nvGrpSpPr>
+          <p:cNvPr id="2055" name="Group 2054">
+            <a:extLst>
+              <a:ext uri="{FF2B5EF4-FFF2-40B4-BE49-F238E27FC236}">
+                <a16:creationId xmlns:a16="http://schemas.microsoft.com/office/drawing/2014/main" id="{88C9B83F-64CD-41C1-925F-A08801FFD0BD}"/>
+              </a:ext>
+              <a:ext uri="{C183D7F6-B498-43B3-948B-1728B52AA6E4}">
+                <adec:decorative xmlns:adec="http://schemas.microsoft.com/office/drawing/2017/decorative" val="1"/>
+              </a:ext>
+            </a:extLst>
+          </p:cNvPr>
+          <p:cNvGrpSpPr>
+            <a:grpSpLocks noGrp="1" noUngrp="1" noRot="1" noChangeAspect="1" noMove="1" noResize="1"/>
+          </p:cNvGrpSpPr>
+          <p:nvPr>
+            <p:extLst>
+              <p:ext uri="{386F3935-93C4-4BCD-93E2-E3B085C9AB24}">
+                <p16:designElem xmlns:p16="http://schemas.microsoft.com/office/powerpoint/2015/main" val="1"/>
+              </p:ext>
+            </p:extLst>
+          </p:nvPr>
+        </p:nvGrpSpPr>
+        <p:grpSpPr>
+          <a:xfrm>
+            <a:off x="0" y="-8467"/>
+            <a:ext cx="12192000" cy="6866467"/>
+            <a:chOff x="0" y="-8467"/>
+            <a:chExt cx="12192000" cy="6866467"/>
+          </a:xfrm>
+        </p:grpSpPr>
+        <p:cxnSp>
+          <p:nvCxnSpPr>
+            <p:cNvPr id="2056" name="Straight Connector 2055">
+              <a:extLst>
+                <a:ext uri="{FF2B5EF4-FFF2-40B4-BE49-F238E27FC236}">
+                  <a16:creationId xmlns:a16="http://schemas.microsoft.com/office/drawing/2014/main" id="{E1655065-0BD7-4422-BEC0-4401E998090A}"/>
+                </a:ext>
+                <a:ext uri="{C183D7F6-B498-43B3-948B-1728B52AA6E4}">
+                  <adec:decorative xmlns:adec="http://schemas.microsoft.com/office/drawing/2017/decorative" val="1"/>
+                </a:ext>
+              </a:extLst>
+            </p:cNvPr>
+            <p:cNvCxnSpPr/>
+            <p:nvPr>
+              <p:extLst>
+                <p:ext uri="{386F3935-93C4-4BCD-93E2-E3B085C9AB24}">
+                  <p16:designElem xmlns:p16="http://schemas.microsoft.com/office/powerpoint/2015/main" val="1"/>
+                </p:ext>
+              </p:extLst>
+            </p:nvPr>
+          </p:nvCxnSpPr>
+          <p:spPr>
+            <a:xfrm>
+              <a:off x="9371012" y="0"/>
+              <a:ext cx="1219200" cy="6858000"/>
+            </a:xfrm>
+            <a:prstGeom prst="line">
+              <a:avLst/>
+            </a:prstGeom>
+            <a:ln w="9525">
+              <a:solidFill>
+                <a:schemeClr val="bg1">
+                  <a:lumMod val="75000"/>
+                </a:schemeClr>
+              </a:solidFill>
+            </a:ln>
+          </p:spPr>
+          <p:style>
+            <a:lnRef idx="2">
+              <a:schemeClr val="accent1"/>
+            </a:lnRef>
+            <a:fillRef idx="0">
+              <a:schemeClr val="accent1"/>
+            </a:fillRef>
+            <a:effectRef idx="1">
+              <a:schemeClr val="accent1"/>
+            </a:effectRef>
+            <a:fontRef idx="minor">
+              <a:schemeClr val="tx1"/>
+            </a:fontRef>
+          </p:style>
+        </p:cxnSp>
+        <p:cxnSp>
+          <p:nvCxnSpPr>
+            <p:cNvPr id="2057" name="Straight Connector 2056">
+              <a:extLst>
+                <a:ext uri="{FF2B5EF4-FFF2-40B4-BE49-F238E27FC236}">
+                  <a16:creationId xmlns:a16="http://schemas.microsoft.com/office/drawing/2014/main" id="{4DDD90AC-ABEC-4A76-9C9C-AD0A5F8FC7F2}"/>
+                </a:ext>
+                <a:ext uri="{C183D7F6-B498-43B3-948B-1728B52AA6E4}">
+                  <adec:decorative xmlns:adec="http://schemas.microsoft.com/office/drawing/2017/decorative" val="1"/>
+                </a:ext>
+              </a:extLst>
+            </p:cNvPr>
+            <p:cNvCxnSpPr/>
+            <p:nvPr>
+              <p:extLst>
+                <p:ext uri="{386F3935-93C4-4BCD-93E2-E3B085C9AB24}">
+                  <p16:designElem xmlns:p16="http://schemas.microsoft.com/office/powerpoint/2015/main" val="1"/>
+                </p:ext>
+              </p:extLst>
+            </p:nvPr>
+          </p:nvCxnSpPr>
+          <p:spPr>
+            <a:xfrm flipH="1">
+              <a:off x="7425267" y="3681413"/>
+              <a:ext cx="4763558" cy="3176587"/>
+            </a:xfrm>
+            <a:prstGeom prst="line">
+              <a:avLst/>
+            </a:prstGeom>
+            <a:ln w="9525">
+              <a:solidFill>
+                <a:schemeClr val="bg1">
+                  <a:lumMod val="85000"/>
+                </a:schemeClr>
+              </a:solidFill>
+            </a:ln>
+          </p:spPr>
+          <p:style>
+            <a:lnRef idx="2">
+              <a:schemeClr val="accent1"/>
+            </a:lnRef>
+            <a:fillRef idx="0">
+              <a:schemeClr val="accent1"/>
+            </a:fillRef>
+            <a:effectRef idx="1">
+              <a:schemeClr val="accent1"/>
+            </a:effectRef>
+            <a:fontRef idx="minor">
+              <a:schemeClr val="tx1"/>
+            </a:fontRef>
+          </p:style>
+        </p:cxnSp>
+        <p:sp>
+          <p:nvSpPr>
+            <p:cNvPr id="2058" name="Rectangle 23">
+              <a:extLst>
+                <a:ext uri="{FF2B5EF4-FFF2-40B4-BE49-F238E27FC236}">
+                  <a16:creationId xmlns:a16="http://schemas.microsoft.com/office/drawing/2014/main" id="{21A8AFEF-EC50-4C0B-9C64-814B76C82090}"/>
+                </a:ext>
+                <a:ext uri="{C183D7F6-B498-43B3-948B-1728B52AA6E4}">
+                  <adec:decorative xmlns:adec="http://schemas.microsoft.com/office/drawing/2017/decorative" val="1"/>
+                </a:ext>
+              </a:extLst>
+            </p:cNvPr>
+            <p:cNvSpPr/>
+            <p:nvPr>
+              <p:extLst>
+                <p:ext uri="{386F3935-93C4-4BCD-93E2-E3B085C9AB24}">
+                  <p16:designElem xmlns:p16="http://schemas.microsoft.com/office/powerpoint/2015/main" val="1"/>
+                </p:ext>
+              </p:extLst>
+            </p:nvPr>
+          </p:nvSpPr>
+          <p:spPr>
+            <a:xfrm>
+              <a:off x="9181476" y="-8467"/>
+              <a:ext cx="3007349" cy="6866467"/>
+            </a:xfrm>
+            <a:custGeom>
+              <a:avLst/>
+              <a:gdLst/>
+              <a:ahLst/>
+              <a:cxnLst/>
+              <a:rect l="l" t="t" r="r" b="b"/>
+              <a:pathLst>
+                <a:path w="3007349" h="6866467">
+                  <a:moveTo>
+                    <a:pt x="2045532" y="0"/>
+                  </a:moveTo>
+                  <a:lnTo>
+                    <a:pt x="3007349" y="0"/>
+                  </a:lnTo>
+                  <a:lnTo>
+                    <a:pt x="3007349" y="6866467"/>
+                  </a:lnTo>
+                  <a:lnTo>
+                    <a:pt x="0" y="6866467"/>
+                  </a:lnTo>
+                  <a:lnTo>
+                    <a:pt x="2045532" y="0"/>
+                  </a:lnTo>
+                  <a:close/>
+                </a:path>
+              </a:pathLst>
+            </a:custGeom>
+            <a:solidFill>
+              <a:schemeClr val="accent1">
+                <a:alpha val="30000"/>
+              </a:schemeClr>
+            </a:solidFill>
+            <a:ln>
+              <a:noFill/>
+            </a:ln>
+            <a:effectLst/>
+          </p:spPr>
+          <p:style>
+            <a:lnRef idx="1">
+              <a:schemeClr val="accent1"/>
+            </a:lnRef>
+            <a:fillRef idx="3">
+              <a:schemeClr val="accent1"/>
+            </a:fillRef>
+            <a:effectRef idx="2">
+              <a:schemeClr val="accent1"/>
+            </a:effectRef>
+            <a:fontRef idx="minor">
+              <a:schemeClr val="lt1"/>
+            </a:fontRef>
+          </p:style>
+        </p:sp>
+        <p:sp>
+          <p:nvSpPr>
+            <p:cNvPr id="2059" name="Rectangle 25">
+              <a:extLst>
+                <a:ext uri="{FF2B5EF4-FFF2-40B4-BE49-F238E27FC236}">
+                  <a16:creationId xmlns:a16="http://schemas.microsoft.com/office/drawing/2014/main" id="{CAFAA800-E117-4357-84E4-56B63EA03E37}"/>
+                </a:ext>
+                <a:ext uri="{C183D7F6-B498-43B3-948B-1728B52AA6E4}">
+                  <adec:decorative xmlns:adec="http://schemas.microsoft.com/office/drawing/2017/decorative" val="1"/>
+                </a:ext>
+              </a:extLst>
+            </p:cNvPr>
+            <p:cNvSpPr/>
+            <p:nvPr>
+              <p:extLst>
+                <p:ext uri="{386F3935-93C4-4BCD-93E2-E3B085C9AB24}">
+                  <p16:designElem xmlns:p16="http://schemas.microsoft.com/office/powerpoint/2015/main" val="1"/>
+                </p:ext>
+              </p:extLst>
+            </p:nvPr>
+          </p:nvSpPr>
+          <p:spPr>
+            <a:xfrm>
+              <a:off x="9603442" y="-8467"/>
+              <a:ext cx="2588558" cy="6866467"/>
+            </a:xfrm>
+            <a:custGeom>
+              <a:avLst/>
+              <a:gdLst/>
+              <a:ahLst/>
+              <a:cxnLst/>
+              <a:rect l="l" t="t" r="r" b="b"/>
+              <a:pathLst>
+                <a:path w="2573311" h="6866467">
+                  <a:moveTo>
+                    <a:pt x="0" y="0"/>
+                  </a:moveTo>
+                  <a:lnTo>
+                    <a:pt x="2573311" y="0"/>
+                  </a:lnTo>
+                  <a:lnTo>
+                    <a:pt x="2573311" y="6866467"/>
+                  </a:lnTo>
+                  <a:lnTo>
+                    <a:pt x="1202336" y="6866467"/>
+                  </a:lnTo>
+                  <a:lnTo>
+                    <a:pt x="0" y="0"/>
+                  </a:lnTo>
+                  <a:close/>
+                </a:path>
+              </a:pathLst>
+            </a:custGeom>
+            <a:solidFill>
+              <a:schemeClr val="accent1">
+                <a:alpha val="20000"/>
+              </a:schemeClr>
+            </a:solidFill>
+            <a:ln>
+              <a:noFill/>
+            </a:ln>
+            <a:effectLst/>
+          </p:spPr>
+          <p:style>
+            <a:lnRef idx="1">
+              <a:schemeClr val="accent1"/>
+            </a:lnRef>
+            <a:fillRef idx="3">
+              <a:schemeClr val="accent1"/>
+            </a:fillRef>
+            <a:effectRef idx="2">
+              <a:schemeClr val="accent1"/>
+            </a:effectRef>
+            <a:fontRef idx="minor">
+              <a:schemeClr val="lt1"/>
+            </a:fontRef>
+          </p:style>
+        </p:sp>
+        <p:sp>
+          <p:nvSpPr>
+            <p:cNvPr id="2060" name="Isosceles Triangle 2059">
+              <a:extLst>
+                <a:ext uri="{FF2B5EF4-FFF2-40B4-BE49-F238E27FC236}">
+                  <a16:creationId xmlns:a16="http://schemas.microsoft.com/office/drawing/2014/main" id="{8DDFC9F4-3B45-402D-8AD7-60B3F08ED755}"/>
+                </a:ext>
+                <a:ext uri="{C183D7F6-B498-43B3-948B-1728B52AA6E4}">
+                  <adec:decorative xmlns:adec="http://schemas.microsoft.com/office/drawing/2017/decorative" val="1"/>
+                </a:ext>
+              </a:extLst>
+            </p:cNvPr>
+            <p:cNvSpPr/>
+            <p:nvPr>
+              <p:extLst>
+                <p:ext uri="{386F3935-93C4-4BCD-93E2-E3B085C9AB24}">
+                  <p16:designElem xmlns:p16="http://schemas.microsoft.com/office/powerpoint/2015/main" val="1"/>
+                </p:ext>
+              </p:extLst>
+            </p:nvPr>
+          </p:nvSpPr>
+          <p:spPr>
+            <a:xfrm>
+              <a:off x="8932333" y="3048000"/>
+              <a:ext cx="3259667" cy="3810000"/>
+            </a:xfrm>
+            <a:prstGeom prst="triangle">
+              <a:avLst>
+                <a:gd name="adj" fmla="val 100000"/>
+              </a:avLst>
+            </a:prstGeom>
+            <a:solidFill>
+              <a:schemeClr val="accent2">
+                <a:alpha val="72000"/>
+              </a:schemeClr>
+            </a:solidFill>
+            <a:ln>
+              <a:noFill/>
+            </a:ln>
+            <a:effectLst/>
+          </p:spPr>
+          <p:style>
+            <a:lnRef idx="1">
+              <a:schemeClr val="accent1"/>
+            </a:lnRef>
+            <a:fillRef idx="3">
+              <a:schemeClr val="accent1"/>
+            </a:fillRef>
+            <a:effectRef idx="2">
+              <a:schemeClr val="accent1"/>
+            </a:effectRef>
+            <a:fontRef idx="minor">
+              <a:schemeClr val="lt1"/>
+            </a:fontRef>
+          </p:style>
+        </p:sp>
+        <p:sp>
+          <p:nvSpPr>
+            <p:cNvPr id="2061" name="Rectangle 27">
+              <a:extLst>
+                <a:ext uri="{FF2B5EF4-FFF2-40B4-BE49-F238E27FC236}">
+                  <a16:creationId xmlns:a16="http://schemas.microsoft.com/office/drawing/2014/main" id="{F26A0854-FBE4-4587-B349-06BE192BD7F6}"/>
+                </a:ext>
+                <a:ext uri="{C183D7F6-B498-43B3-948B-1728B52AA6E4}">
+                  <adec:decorative xmlns:adec="http://schemas.microsoft.com/office/drawing/2017/decorative" val="1"/>
+                </a:ext>
+              </a:extLst>
+            </p:cNvPr>
+            <p:cNvSpPr/>
+            <p:nvPr>
+              <p:extLst>
+                <p:ext uri="{386F3935-93C4-4BCD-93E2-E3B085C9AB24}">
+                  <p16:designElem xmlns:p16="http://schemas.microsoft.com/office/powerpoint/2015/main" val="1"/>
+                </p:ext>
+              </p:extLst>
+            </p:nvPr>
+          </p:nvSpPr>
+          <p:spPr>
+            <a:xfrm>
+              <a:off x="9334500" y="-8467"/>
+              <a:ext cx="2854326" cy="6866467"/>
+            </a:xfrm>
+            <a:custGeom>
+              <a:avLst/>
+              <a:gdLst/>
+              <a:ahLst/>
+              <a:cxnLst/>
+              <a:rect l="l" t="t" r="r" b="b"/>
+              <a:pathLst>
+                <a:path w="2858013" h="6866467">
+                  <a:moveTo>
+                    <a:pt x="0" y="0"/>
+                  </a:moveTo>
+                  <a:lnTo>
+                    <a:pt x="2858013" y="0"/>
+                  </a:lnTo>
+                  <a:lnTo>
+                    <a:pt x="2858013" y="6866467"/>
+                  </a:lnTo>
+                  <a:lnTo>
+                    <a:pt x="2473942" y="6866467"/>
+                  </a:lnTo>
+                  <a:lnTo>
+                    <a:pt x="0" y="0"/>
+                  </a:lnTo>
+                  <a:close/>
+                </a:path>
+              </a:pathLst>
+            </a:custGeom>
+            <a:solidFill>
+              <a:schemeClr val="accent2">
+                <a:lumMod val="75000"/>
+                <a:alpha val="70000"/>
+              </a:schemeClr>
+            </a:solidFill>
+            <a:ln>
+              <a:noFill/>
+            </a:ln>
+            <a:effectLst/>
+          </p:spPr>
+          <p:style>
+            <a:lnRef idx="1">
+              <a:schemeClr val="accent1"/>
+            </a:lnRef>
+            <a:fillRef idx="3">
+              <a:schemeClr val="accent1"/>
+            </a:fillRef>
+            <a:effectRef idx="2">
+              <a:schemeClr val="accent1"/>
+            </a:effectRef>
+            <a:fontRef idx="minor">
+              <a:schemeClr val="lt1"/>
+            </a:fontRef>
+          </p:style>
+        </p:sp>
+        <p:sp>
+          <p:nvSpPr>
+            <p:cNvPr id="2062" name="Rectangle 28">
+              <a:extLst>
+                <a:ext uri="{FF2B5EF4-FFF2-40B4-BE49-F238E27FC236}">
+                  <a16:creationId xmlns:a16="http://schemas.microsoft.com/office/drawing/2014/main" id="{54A9C4C6-FF7D-470E-BFCA-CE4F60A1F0A8}"/>
+                </a:ext>
+                <a:ext uri="{C183D7F6-B498-43B3-948B-1728B52AA6E4}">
+                  <adec:decorative xmlns:adec="http://schemas.microsoft.com/office/drawing/2017/decorative" val="1"/>
+                </a:ext>
+              </a:extLst>
+            </p:cNvPr>
+            <p:cNvSpPr/>
+            <p:nvPr>
+              <p:extLst>
+                <p:ext uri="{386F3935-93C4-4BCD-93E2-E3B085C9AB24}">
+                  <p16:designElem xmlns:p16="http://schemas.microsoft.com/office/powerpoint/2015/main" val="1"/>
+                </p:ext>
+              </p:extLst>
+            </p:nvPr>
+          </p:nvSpPr>
+          <p:spPr>
+            <a:xfrm>
+              <a:off x="10898730" y="-8467"/>
+              <a:ext cx="1290094" cy="6866467"/>
+            </a:xfrm>
+            <a:custGeom>
+              <a:avLst/>
+              <a:gdLst/>
+              <a:ahLst/>
+              <a:cxnLst/>
+              <a:rect l="l" t="t" r="r" b="b"/>
+              <a:pathLst>
+                <a:path w="1290094" h="6858000">
+                  <a:moveTo>
+                    <a:pt x="1019735" y="0"/>
+                  </a:moveTo>
+                  <a:lnTo>
+                    <a:pt x="1290094" y="0"/>
+                  </a:lnTo>
+                  <a:lnTo>
+                    <a:pt x="1290094" y="6858000"/>
+                  </a:lnTo>
+                  <a:lnTo>
+                    <a:pt x="0" y="6858000"/>
+                  </a:lnTo>
+                  <a:lnTo>
+                    <a:pt x="1019735" y="0"/>
+                  </a:lnTo>
+                  <a:close/>
+                </a:path>
+              </a:pathLst>
+            </a:custGeom>
+            <a:solidFill>
+              <a:schemeClr val="accent1">
+                <a:lumMod val="60000"/>
+                <a:lumOff val="40000"/>
+                <a:alpha val="70000"/>
+              </a:schemeClr>
+            </a:solidFill>
+            <a:ln>
+              <a:noFill/>
+            </a:ln>
+            <a:effectLst/>
+          </p:spPr>
+          <p:style>
+            <a:lnRef idx="1">
+              <a:schemeClr val="accent1"/>
+            </a:lnRef>
+            <a:fillRef idx="3">
+              <a:schemeClr val="accent1"/>
+            </a:fillRef>
+            <a:effectRef idx="2">
+              <a:schemeClr val="accent1"/>
+            </a:effectRef>
+            <a:fontRef idx="minor">
+              <a:schemeClr val="lt1"/>
+            </a:fontRef>
+          </p:style>
+        </p:sp>
+        <p:sp>
+          <p:nvSpPr>
+            <p:cNvPr id="2063" name="Rectangle 29">
+              <a:extLst>
+                <a:ext uri="{FF2B5EF4-FFF2-40B4-BE49-F238E27FC236}">
+                  <a16:creationId xmlns:a16="http://schemas.microsoft.com/office/drawing/2014/main" id="{B1721EA8-4871-45D4-B78F-AE805A3004B1}"/>
+                </a:ext>
+                <a:ext uri="{C183D7F6-B498-43B3-948B-1728B52AA6E4}">
+                  <adec:decorative xmlns:adec="http://schemas.microsoft.com/office/drawing/2017/decorative" val="1"/>
+                </a:ext>
+              </a:extLst>
+            </p:cNvPr>
+            <p:cNvSpPr/>
+            <p:nvPr>
+              <p:extLst>
+                <p:ext uri="{386F3935-93C4-4BCD-93E2-E3B085C9AB24}">
+                  <p16:designElem xmlns:p16="http://schemas.microsoft.com/office/powerpoint/2015/main" val="1"/>
+                </p:ext>
+              </p:extLst>
+            </p:nvPr>
+          </p:nvSpPr>
+          <p:spPr>
+            <a:xfrm>
+              <a:off x="10938999" y="-8467"/>
+              <a:ext cx="1249825" cy="6866467"/>
+            </a:xfrm>
+            <a:custGeom>
+              <a:avLst/>
+              <a:gdLst/>
+              <a:ahLst/>
+              <a:cxnLst/>
+              <a:rect l="l" t="t" r="r" b="b"/>
+              <a:pathLst>
+                <a:path w="1249825" h="6858000">
+                  <a:moveTo>
+                    <a:pt x="0" y="0"/>
+                  </a:moveTo>
+                  <a:lnTo>
+                    <a:pt x="1249825" y="0"/>
+                  </a:lnTo>
+                  <a:lnTo>
+                    <a:pt x="1249825" y="6858000"/>
+                  </a:lnTo>
+                  <a:lnTo>
+                    <a:pt x="1109382" y="6858000"/>
+                  </a:lnTo>
+                  <a:lnTo>
+                    <a:pt x="0" y="0"/>
+                  </a:lnTo>
+                  <a:close/>
+                </a:path>
+              </a:pathLst>
+            </a:custGeom>
+            <a:solidFill>
+              <a:schemeClr val="accent1">
+                <a:alpha val="65000"/>
+              </a:schemeClr>
+            </a:solidFill>
+            <a:ln>
+              <a:noFill/>
+            </a:ln>
+            <a:effectLst/>
+          </p:spPr>
+          <p:style>
+            <a:lnRef idx="1">
+              <a:schemeClr val="accent1"/>
+            </a:lnRef>
+            <a:fillRef idx="3">
+              <a:schemeClr val="accent1"/>
+            </a:fillRef>
+            <a:effectRef idx="2">
+              <a:schemeClr val="accent1"/>
+            </a:effectRef>
+            <a:fontRef idx="minor">
+              <a:schemeClr val="lt1"/>
+            </a:fontRef>
+          </p:style>
+        </p:sp>
+        <p:sp>
+          <p:nvSpPr>
+            <p:cNvPr id="2064" name="Isosceles Triangle 2063">
+              <a:extLst>
+                <a:ext uri="{FF2B5EF4-FFF2-40B4-BE49-F238E27FC236}">
+                  <a16:creationId xmlns:a16="http://schemas.microsoft.com/office/drawing/2014/main" id="{E5763971-E3A3-45C6-9BA8-2E032C7A55EB}"/>
+                </a:ext>
+                <a:ext uri="{C183D7F6-B498-43B3-948B-1728B52AA6E4}">
+                  <adec:decorative xmlns:adec="http://schemas.microsoft.com/office/drawing/2017/decorative" val="1"/>
+                </a:ext>
+              </a:extLst>
+            </p:cNvPr>
+            <p:cNvSpPr/>
+            <p:nvPr>
+              <p:extLst>
+                <p:ext uri="{386F3935-93C4-4BCD-93E2-E3B085C9AB24}">
+                  <p16:designElem xmlns:p16="http://schemas.microsoft.com/office/powerpoint/2015/main" val="1"/>
+                </p:ext>
+              </p:extLst>
+            </p:nvPr>
+          </p:nvSpPr>
+          <p:spPr>
+            <a:xfrm>
+              <a:off x="10371666" y="3589867"/>
+              <a:ext cx="1817159" cy="3268133"/>
+            </a:xfrm>
+            <a:prstGeom prst="triangle">
+              <a:avLst>
+                <a:gd name="adj" fmla="val 100000"/>
+              </a:avLst>
+            </a:prstGeom>
+            <a:solidFill>
+              <a:schemeClr val="accent1">
+                <a:alpha val="80000"/>
+              </a:schemeClr>
+            </a:solidFill>
+            <a:ln>
+              <a:noFill/>
+            </a:ln>
+            <a:effectLst/>
+          </p:spPr>
+          <p:style>
+            <a:lnRef idx="1">
+              <a:schemeClr val="accent1"/>
+            </a:lnRef>
+            <a:fillRef idx="3">
+              <a:schemeClr val="accent1"/>
+            </a:fillRef>
+            <a:effectRef idx="2">
+              <a:schemeClr val="accent1"/>
+            </a:effectRef>
+            <a:fontRef idx="minor">
+              <a:schemeClr val="lt1"/>
+            </a:fontRef>
+          </p:style>
+        </p:sp>
+        <p:sp>
+          <p:nvSpPr>
+            <p:cNvPr id="2065" name="Isosceles Triangle 2064">
+              <a:extLst>
+                <a:ext uri="{FF2B5EF4-FFF2-40B4-BE49-F238E27FC236}">
+                  <a16:creationId xmlns:a16="http://schemas.microsoft.com/office/drawing/2014/main" id="{32752E94-0E01-4AF5-A43A-F2FAD8737C29}"/>
+                </a:ext>
+                <a:ext uri="{C183D7F6-B498-43B3-948B-1728B52AA6E4}">
+                  <adec:decorative xmlns:adec="http://schemas.microsoft.com/office/drawing/2017/decorative" val="1"/>
+                </a:ext>
+              </a:extLst>
+            </p:cNvPr>
+            <p:cNvSpPr/>
+            <p:nvPr>
+              <p:extLst>
+                <p:ext uri="{386F3935-93C4-4BCD-93E2-E3B085C9AB24}">
+                  <p16:designElem xmlns:p16="http://schemas.microsoft.com/office/powerpoint/2015/main" val="1"/>
+                </p:ext>
+              </p:extLst>
+            </p:nvPr>
+          </p:nvSpPr>
+          <p:spPr>
+            <a:xfrm rot="10800000">
+              <a:off x="0" y="0"/>
+              <a:ext cx="842596" cy="5666154"/>
+            </a:xfrm>
+            <a:prstGeom prst="triangle">
+              <a:avLst>
+                <a:gd name="adj" fmla="val 100000"/>
+              </a:avLst>
+            </a:prstGeom>
+            <a:solidFill>
+              <a:schemeClr val="accent1">
+                <a:alpha val="85000"/>
+              </a:schemeClr>
+            </a:solidFill>
+            <a:ln>
+              <a:noFill/>
+            </a:ln>
+            <a:effectLst/>
+          </p:spPr>
+          <p:style>
+            <a:lnRef idx="1">
+              <a:schemeClr val="accent1"/>
+            </a:lnRef>
+            <a:fillRef idx="3">
+              <a:schemeClr val="accent1"/>
+            </a:fillRef>
+            <a:effectRef idx="2">
+              <a:schemeClr val="accent1"/>
+            </a:effectRef>
+            <a:fontRef idx="minor">
+              <a:schemeClr val="lt1"/>
+            </a:fontRef>
+          </p:style>
+        </p:sp>
+      </p:grpSp>
+      <p:pic>
+        <p:nvPicPr>
+          <p:cNvPr id="2050" name="Picture 2">
+            <a:extLst>
+              <a:ext uri="{FF2B5EF4-FFF2-40B4-BE49-F238E27FC236}">
+                <a16:creationId xmlns:a16="http://schemas.microsoft.com/office/drawing/2014/main" id="{6FB4FC6E-084D-BD48-F2AC-3545C154C57F}"/>
+              </a:ext>
+            </a:extLst>
+          </p:cNvPr>
+          <p:cNvPicPr>
+            <a:picLocks noGrp="1" noChangeAspect="1" noChangeArrowheads="1"/>
+          </p:cNvPicPr>
+          <p:nvPr>
+            <p:ph idx="1"/>
+          </p:nvPr>
+        </p:nvPicPr>
+        <p:blipFill rotWithShape="1">
+          <a:blip r:embed="rId2">
+            <a:extLst>
+              <a:ext uri="{28A0092B-C50C-407E-A947-70E740481C1C}">
+                <a14:useLocalDpi xmlns:a14="http://schemas.microsoft.com/office/drawing/2010/main" val="0"/>
+              </a:ext>
+            </a:extLst>
+          </a:blip>
+          <a:srcRect l="1076" t="9095" r="8013" b="29323"/>
+          <a:stretch/>
+        </p:blipFill>
+        <p:spPr bwMode="auto">
+          <a:xfrm>
+            <a:off x="4269854" y="-1"/>
+            <a:ext cx="7922146" cy="6858001"/>
+          </a:xfrm>
+          <a:custGeom>
+            <a:avLst/>
+            <a:gdLst/>
+            <a:ahLst/>
+            <a:cxnLst/>
+            <a:rect l="l" t="t" r="r" b="b"/>
+            <a:pathLst>
+              <a:path w="7922146" h="6858001">
+                <a:moveTo>
+                  <a:pt x="379987" y="0"/>
+                </a:moveTo>
+                <a:lnTo>
+                  <a:pt x="5304971" y="0"/>
+                </a:lnTo>
+                <a:lnTo>
+                  <a:pt x="7065281" y="0"/>
+                </a:lnTo>
+                <a:lnTo>
+                  <a:pt x="7397540" y="0"/>
+                </a:lnTo>
+                <a:lnTo>
+                  <a:pt x="7397540" y="1"/>
+                </a:lnTo>
+                <a:lnTo>
+                  <a:pt x="7922146" y="1"/>
+                </a:lnTo>
+                <a:lnTo>
+                  <a:pt x="7922146" y="6858001"/>
+                </a:lnTo>
+                <a:lnTo>
+                  <a:pt x="7065281" y="6858001"/>
+                </a:lnTo>
+                <a:lnTo>
+                  <a:pt x="7065281" y="6858000"/>
+                </a:lnTo>
+                <a:lnTo>
+                  <a:pt x="5932989" y="6858000"/>
+                </a:lnTo>
+                <a:lnTo>
+                  <a:pt x="5932989" y="6858001"/>
+                </a:lnTo>
+                <a:lnTo>
+                  <a:pt x="27809" y="6858001"/>
+                </a:lnTo>
+                <a:lnTo>
+                  <a:pt x="1803228" y="4521201"/>
+                </a:lnTo>
+                <a:close/>
+                <a:moveTo>
+                  <a:pt x="0" y="0"/>
+                </a:moveTo>
+                <a:lnTo>
+                  <a:pt x="379987" y="0"/>
+                </a:lnTo>
+                <a:lnTo>
+                  <a:pt x="0" y="407"/>
+                </a:lnTo>
+                <a:close/>
+              </a:path>
+            </a:pathLst>
+          </a:custGeom>
+          <a:noFill/>
+          <a:extLst>
+            <a:ext uri="{909E8E84-426E-40DD-AFC4-6F175D3DCCD1}">
+              <a14:hiddenFill xmlns:a14="http://schemas.microsoft.com/office/drawing/2010/main">
+                <a:solidFill>
+                  <a:srgbClr val="FFFFFF"/>
+                </a:solidFill>
+              </a14:hiddenFill>
+            </a:ext>
+          </a:extLst>
+        </p:spPr>
+      </p:pic>
+      <p:sp>
+        <p:nvSpPr>
+          <p:cNvPr id="2" name="Title 1">
+            <a:extLst>
+              <a:ext uri="{FF2B5EF4-FFF2-40B4-BE49-F238E27FC236}">
+                <a16:creationId xmlns:a16="http://schemas.microsoft.com/office/drawing/2014/main" id="{85E43715-2ACB-6BCA-DBAD-75FEFAD18245}"/>
+              </a:ext>
+            </a:extLst>
+          </p:cNvPr>
+          <p:cNvSpPr>
+            <a:spLocks noGrp="1"/>
+          </p:cNvSpPr>
+          <p:nvPr>
+            <p:ph type="title"/>
+          </p:nvPr>
+        </p:nvSpPr>
+        <p:spPr>
+          <a:xfrm>
+            <a:off x="668867" y="1191846"/>
+            <a:ext cx="4088190" cy="4846815"/>
+          </a:xfrm>
+        </p:spPr>
+        <p:txBody>
+          <a:bodyPr vert="horz" lIns="91440" tIns="45720" rIns="91440" bIns="45720" rtlCol="0" anchor="b">
+            <a:normAutofit/>
+          </a:bodyPr>
+          <a:lstStyle/>
+          <a:p>
+            <a:pPr algn="ctr"/>
+            <a:r>
+              <a:rPr lang="pl-PL" sz="4800" dirty="0"/>
+              <a:t>Czy poprawna metodologia jest decydująca?</a:t>
+            </a:r>
+            <a:br>
+              <a:rPr lang="pl-PL" sz="4800"/>
+            </a:br>
+            <a:br>
+              <a:rPr lang="pl-PL" sz="4800" dirty="0"/>
+            </a:br>
+            <a:r>
+              <a:rPr lang="pl-PL" sz="4800" dirty="0"/>
+              <a:t>Alfred </a:t>
+            </a:r>
+            <a:r>
+              <a:rPr lang="pl-PL" sz="4800" dirty="0" err="1"/>
+              <a:t>Kinsley</a:t>
+            </a:r>
+            <a:endParaRPr lang="en-US" sz="4800" dirty="0"/>
+          </a:p>
+        </p:txBody>
+      </p:sp>
+      <p:cxnSp>
+        <p:nvCxnSpPr>
+          <p:cNvPr id="2067" name="Straight Connector 2066">
+            <a:extLst>
+              <a:ext uri="{FF2B5EF4-FFF2-40B4-BE49-F238E27FC236}">
+                <a16:creationId xmlns:a16="http://schemas.microsoft.com/office/drawing/2014/main" id="{A57C1A16-B8AB-4D99-A195-A38F556A6486}"/>
+              </a:ext>
+              <a:ext uri="{C183D7F6-B498-43B3-948B-1728B52AA6E4}">
+                <adec:decorative xmlns:adec="http://schemas.microsoft.com/office/drawing/2017/decorative" val="1"/>
+              </a:ext>
+            </a:extLst>
+          </p:cNvPr>
+          <p:cNvCxnSpPr>
+            <a:cxnSpLocks noGrp="1" noRot="1" noChangeAspect="1" noMove="1" noResize="1" noEditPoints="1" noAdjustHandles="1" noChangeArrowheads="1" noChangeShapeType="1"/>
+          </p:cNvCxnSpPr>
+          <p:nvPr>
+            <p:extLst>
+              <p:ext uri="{386F3935-93C4-4BCD-93E2-E3B085C9AB24}">
+                <p16:designElem xmlns:p16="http://schemas.microsoft.com/office/powerpoint/2015/main" val="1"/>
+              </p:ext>
+            </p:extLst>
+          </p:nvPr>
+        </p:nvCxnSpPr>
+        <p:spPr>
+          <a:xfrm>
+            <a:off x="9371012" y="0"/>
+            <a:ext cx="1219200" cy="6858000"/>
+          </a:xfrm>
+          <a:prstGeom prst="line">
+            <a:avLst/>
+          </a:prstGeom>
+          <a:ln w="9525">
+            <a:solidFill>
+              <a:schemeClr val="bg1">
+                <a:lumMod val="75000"/>
+              </a:schemeClr>
+            </a:solidFill>
+          </a:ln>
+        </p:spPr>
+        <p:style>
+          <a:lnRef idx="2">
+            <a:schemeClr val="accent1"/>
+          </a:lnRef>
+          <a:fillRef idx="0">
+            <a:schemeClr val="accent1"/>
+          </a:fillRef>
+          <a:effectRef idx="1">
+            <a:schemeClr val="accent1"/>
+          </a:effectRef>
+          <a:fontRef idx="minor">
+            <a:schemeClr val="tx1"/>
+          </a:fontRef>
+        </p:style>
+      </p:cxnSp>
+      <p:cxnSp>
+        <p:nvCxnSpPr>
+          <p:cNvPr id="2069" name="Straight Connector 2068">
+            <a:extLst>
+              <a:ext uri="{FF2B5EF4-FFF2-40B4-BE49-F238E27FC236}">
+                <a16:creationId xmlns:a16="http://schemas.microsoft.com/office/drawing/2014/main" id="{F8A9B20B-D1DD-4573-B5EC-558029519236}"/>
+              </a:ext>
+              <a:ext uri="{C183D7F6-B498-43B3-948B-1728B52AA6E4}">
+                <adec:decorative xmlns:adec="http://schemas.microsoft.com/office/drawing/2017/decorative" val="1"/>
+              </a:ext>
+            </a:extLst>
+          </p:cNvPr>
+          <p:cNvCxnSpPr>
+            <a:cxnSpLocks noGrp="1" noRot="1" noChangeAspect="1" noMove="1" noResize="1" noEditPoints="1" noAdjustHandles="1" noChangeArrowheads="1" noChangeShapeType="1"/>
+          </p:cNvCxnSpPr>
+          <p:nvPr>
+            <p:extLst>
+              <p:ext uri="{386F3935-93C4-4BCD-93E2-E3B085C9AB24}">
+                <p16:designElem xmlns:p16="http://schemas.microsoft.com/office/powerpoint/2015/main" val="1"/>
+              </p:ext>
+            </p:extLst>
+          </p:nvPr>
+        </p:nvCxnSpPr>
+        <p:spPr>
+          <a:xfrm flipH="1">
+            <a:off x="7425267" y="3681413"/>
+            <a:ext cx="4763558" cy="3176587"/>
+          </a:xfrm>
+          <a:prstGeom prst="line">
+            <a:avLst/>
+          </a:prstGeom>
+          <a:ln w="9525">
+            <a:solidFill>
+              <a:schemeClr val="bg1">
+                <a:lumMod val="85000"/>
+              </a:schemeClr>
+            </a:solidFill>
+          </a:ln>
+        </p:spPr>
+        <p:style>
+          <a:lnRef idx="2">
+            <a:schemeClr val="accent1"/>
+          </a:lnRef>
+          <a:fillRef idx="0">
+            <a:schemeClr val="accent1"/>
+          </a:fillRef>
+          <a:effectRef idx="1">
+            <a:schemeClr val="accent1"/>
+          </a:effectRef>
+          <a:fontRef idx="minor">
+            <a:schemeClr val="tx1"/>
+          </a:fontRef>
+        </p:style>
+      </p:cxnSp>
+      <p:sp>
+        <p:nvSpPr>
+          <p:cNvPr id="2071" name="Rectangle 23">
+            <a:extLst>
+              <a:ext uri="{FF2B5EF4-FFF2-40B4-BE49-F238E27FC236}">
+                <a16:creationId xmlns:a16="http://schemas.microsoft.com/office/drawing/2014/main" id="{66D61E08-70C3-48D8-BEA0-787111DC30DA}"/>
+              </a:ext>
+              <a:ext uri="{C183D7F6-B498-43B3-948B-1728B52AA6E4}">
+                <adec:decorative xmlns:adec="http://schemas.microsoft.com/office/drawing/2017/decorative" val="1"/>
+              </a:ext>
+            </a:extLst>
+          </p:cNvPr>
+          <p:cNvSpPr>
+            <a:spLocks noGrp="1" noRot="1" noChangeAspect="1" noMove="1" noResize="1" noEditPoints="1" noAdjustHandles="1" noChangeArrowheads="1" noChangeShapeType="1" noTextEdit="1"/>
+          </p:cNvSpPr>
+          <p:nvPr>
+            <p:extLst>
+              <p:ext uri="{386F3935-93C4-4BCD-93E2-E3B085C9AB24}">
+                <p16:designElem xmlns:p16="http://schemas.microsoft.com/office/powerpoint/2015/main" val="1"/>
+              </p:ext>
+            </p:extLst>
+          </p:nvPr>
+        </p:nvSpPr>
+        <p:spPr>
+          <a:xfrm>
+            <a:off x="9181476" y="-8467"/>
+            <a:ext cx="3007349" cy="6866467"/>
+          </a:xfrm>
+          <a:custGeom>
+            <a:avLst/>
+            <a:gdLst/>
+            <a:ahLst/>
+            <a:cxnLst/>
+            <a:rect l="l" t="t" r="r" b="b"/>
+            <a:pathLst>
+              <a:path w="3007349" h="6866467">
+                <a:moveTo>
+                  <a:pt x="2045532" y="0"/>
+                </a:moveTo>
+                <a:lnTo>
+                  <a:pt x="3007349" y="0"/>
+                </a:lnTo>
+                <a:lnTo>
+                  <a:pt x="3007349" y="6866467"/>
+                </a:lnTo>
+                <a:lnTo>
+                  <a:pt x="0" y="6866467"/>
+                </a:lnTo>
+                <a:lnTo>
+                  <a:pt x="2045532" y="0"/>
+                </a:lnTo>
+                <a:close/>
+              </a:path>
+            </a:pathLst>
+          </a:custGeom>
+          <a:solidFill>
+            <a:schemeClr val="accent1">
+              <a:alpha val="30000"/>
+            </a:schemeClr>
+          </a:solidFill>
+          <a:ln>
+            <a:noFill/>
+          </a:ln>
+          <a:effectLst/>
+        </p:spPr>
+        <p:style>
+          <a:lnRef idx="1">
+            <a:schemeClr val="accent1"/>
+          </a:lnRef>
+          <a:fillRef idx="3">
+            <a:schemeClr val="accent1"/>
+          </a:fillRef>
+          <a:effectRef idx="2">
+            <a:schemeClr val="accent1"/>
+          </a:effectRef>
+          <a:fontRef idx="minor">
+            <a:schemeClr val="lt1"/>
+          </a:fontRef>
+        </p:style>
+      </p:sp>
+      <p:sp>
+        <p:nvSpPr>
+          <p:cNvPr id="2073" name="Rectangle 25">
+            <a:extLst>
+              <a:ext uri="{FF2B5EF4-FFF2-40B4-BE49-F238E27FC236}">
+                <a16:creationId xmlns:a16="http://schemas.microsoft.com/office/drawing/2014/main" id="{FC55298F-0AE5-478E-AD2B-03C2614C5833}"/>
+              </a:ext>
+              <a:ext uri="{C183D7F6-B498-43B3-948B-1728B52AA6E4}">
+                <adec:decorative xmlns:adec="http://schemas.microsoft.com/office/drawing/2017/decorative" val="1"/>
+              </a:ext>
+            </a:extLst>
+          </p:cNvPr>
+          <p:cNvSpPr>
+            <a:spLocks noGrp="1" noRot="1" noChangeAspect="1" noMove="1" noResize="1" noEditPoints="1" noAdjustHandles="1" noChangeArrowheads="1" noChangeShapeType="1" noTextEdit="1"/>
+          </p:cNvSpPr>
+          <p:nvPr>
+            <p:extLst>
+              <p:ext uri="{386F3935-93C4-4BCD-93E2-E3B085C9AB24}">
+                <p16:designElem xmlns:p16="http://schemas.microsoft.com/office/powerpoint/2015/main" val="1"/>
+              </p:ext>
+            </p:extLst>
+          </p:nvPr>
+        </p:nvSpPr>
+        <p:spPr>
+          <a:xfrm>
+            <a:off x="9603442" y="-8467"/>
+            <a:ext cx="2588558" cy="6866467"/>
+          </a:xfrm>
+          <a:custGeom>
+            <a:avLst/>
+            <a:gdLst/>
+            <a:ahLst/>
+            <a:cxnLst/>
+            <a:rect l="l" t="t" r="r" b="b"/>
+            <a:pathLst>
+              <a:path w="2573311" h="6866467">
+                <a:moveTo>
+                  <a:pt x="0" y="0"/>
+                </a:moveTo>
+                <a:lnTo>
+                  <a:pt x="2573311" y="0"/>
+                </a:lnTo>
+                <a:lnTo>
+                  <a:pt x="2573311" y="6866467"/>
+                </a:lnTo>
+                <a:lnTo>
+                  <a:pt x="1202336" y="6866467"/>
+                </a:lnTo>
+                <a:lnTo>
+                  <a:pt x="0" y="0"/>
+                </a:lnTo>
+                <a:close/>
+              </a:path>
+            </a:pathLst>
+          </a:custGeom>
+          <a:solidFill>
+            <a:schemeClr val="accent1">
+              <a:alpha val="20000"/>
+            </a:schemeClr>
+          </a:solidFill>
+          <a:ln>
+            <a:noFill/>
+          </a:ln>
+          <a:effectLst/>
+        </p:spPr>
+        <p:style>
+          <a:lnRef idx="1">
+            <a:schemeClr val="accent1"/>
+          </a:lnRef>
+          <a:fillRef idx="3">
+            <a:schemeClr val="accent1"/>
+          </a:fillRef>
+          <a:effectRef idx="2">
+            <a:schemeClr val="accent1"/>
+          </a:effectRef>
+          <a:fontRef idx="minor">
+            <a:schemeClr val="lt1"/>
+          </a:fontRef>
+        </p:style>
+      </p:sp>
+      <p:sp>
+        <p:nvSpPr>
+          <p:cNvPr id="2075" name="Isosceles Triangle 24">
+            <a:extLst>
+              <a:ext uri="{FF2B5EF4-FFF2-40B4-BE49-F238E27FC236}">
+                <a16:creationId xmlns:a16="http://schemas.microsoft.com/office/drawing/2014/main" id="{C180E4EA-0B63-4779-A895-7E90E71088F3}"/>
+              </a:ext>
+              <a:ext uri="{C183D7F6-B498-43B3-948B-1728B52AA6E4}">
+                <adec:decorative xmlns:adec="http://schemas.microsoft.com/office/drawing/2017/decorative" val="1"/>
+              </a:ext>
+            </a:extLst>
+          </p:cNvPr>
+          <p:cNvSpPr>
+            <a:spLocks noGrp="1" noRot="1" noChangeAspect="1" noMove="1" noResize="1" noEditPoints="1" noAdjustHandles="1" noChangeArrowheads="1" noChangeShapeType="1" noTextEdit="1"/>
+          </p:cNvSpPr>
+          <p:nvPr>
+            <p:extLst>
+              <p:ext uri="{386F3935-93C4-4BCD-93E2-E3B085C9AB24}">
+                <p16:designElem xmlns:p16="http://schemas.microsoft.com/office/powerpoint/2015/main" val="1"/>
+              </p:ext>
+            </p:extLst>
+          </p:nvPr>
+        </p:nvSpPr>
+        <p:spPr>
+          <a:xfrm>
+            <a:off x="8932333" y="3048000"/>
+            <a:ext cx="3259667" cy="3810000"/>
+          </a:xfrm>
+          <a:prstGeom prst="triangle">
+            <a:avLst>
+              <a:gd name="adj" fmla="val 100000"/>
+            </a:avLst>
+          </a:prstGeom>
+          <a:solidFill>
+            <a:schemeClr val="accent2">
+              <a:alpha val="72000"/>
+            </a:schemeClr>
+          </a:solidFill>
+          <a:ln>
+            <a:noFill/>
+          </a:ln>
+          <a:effectLst/>
+        </p:spPr>
+        <p:style>
+          <a:lnRef idx="1">
+            <a:schemeClr val="accent1"/>
+          </a:lnRef>
+          <a:fillRef idx="3">
+            <a:schemeClr val="accent1"/>
+          </a:fillRef>
+          <a:effectRef idx="2">
+            <a:schemeClr val="accent1"/>
+          </a:effectRef>
+          <a:fontRef idx="minor">
+            <a:schemeClr val="lt1"/>
+          </a:fontRef>
+        </p:style>
+      </p:sp>
+      <p:sp>
+        <p:nvSpPr>
+          <p:cNvPr id="2077" name="Rectangle 27">
+            <a:extLst>
+              <a:ext uri="{FF2B5EF4-FFF2-40B4-BE49-F238E27FC236}">
+                <a16:creationId xmlns:a16="http://schemas.microsoft.com/office/drawing/2014/main" id="{CEE01D9D-3DE8-4EED-B0D3-8F3C79CC7673}"/>
+              </a:ext>
+              <a:ext uri="{C183D7F6-B498-43B3-948B-1728B52AA6E4}">
+                <adec:decorative xmlns:adec="http://schemas.microsoft.com/office/drawing/2017/decorative" val="1"/>
+              </a:ext>
+            </a:extLst>
+          </p:cNvPr>
+          <p:cNvSpPr>
+            <a:spLocks noGrp="1" noRot="1" noChangeAspect="1" noMove="1" noResize="1" noEditPoints="1" noAdjustHandles="1" noChangeArrowheads="1" noChangeShapeType="1" noTextEdit="1"/>
+          </p:cNvSpPr>
+          <p:nvPr>
+            <p:extLst>
+              <p:ext uri="{386F3935-93C4-4BCD-93E2-E3B085C9AB24}">
+                <p16:designElem xmlns:p16="http://schemas.microsoft.com/office/powerpoint/2015/main" val="1"/>
+              </p:ext>
+            </p:extLst>
+          </p:nvPr>
+        </p:nvSpPr>
+        <p:spPr>
+          <a:xfrm>
+            <a:off x="9334500" y="-8467"/>
+            <a:ext cx="2854326" cy="6866467"/>
+          </a:xfrm>
+          <a:custGeom>
+            <a:avLst/>
+            <a:gdLst/>
+            <a:ahLst/>
+            <a:cxnLst/>
+            <a:rect l="l" t="t" r="r" b="b"/>
+            <a:pathLst>
+              <a:path w="2858013" h="6866467">
+                <a:moveTo>
+                  <a:pt x="0" y="0"/>
+                </a:moveTo>
+                <a:lnTo>
+                  <a:pt x="2858013" y="0"/>
+                </a:lnTo>
+                <a:lnTo>
+                  <a:pt x="2858013" y="6866467"/>
+                </a:lnTo>
+                <a:lnTo>
+                  <a:pt x="2473942" y="6866467"/>
+                </a:lnTo>
+                <a:lnTo>
+                  <a:pt x="0" y="0"/>
+                </a:lnTo>
+                <a:close/>
+              </a:path>
+            </a:pathLst>
+          </a:custGeom>
+          <a:solidFill>
+            <a:schemeClr val="accent2">
+              <a:lumMod val="75000"/>
+              <a:alpha val="47000"/>
+            </a:schemeClr>
+          </a:solidFill>
+          <a:ln>
+            <a:noFill/>
+          </a:ln>
+          <a:effectLst/>
+        </p:spPr>
+        <p:style>
+          <a:lnRef idx="1">
+            <a:schemeClr val="accent1"/>
+          </a:lnRef>
+          <a:fillRef idx="3">
+            <a:schemeClr val="accent1"/>
+          </a:fillRef>
+          <a:effectRef idx="2">
+            <a:schemeClr val="accent1"/>
+          </a:effectRef>
+          <a:fontRef idx="minor">
+            <a:schemeClr val="lt1"/>
+          </a:fontRef>
+        </p:style>
+      </p:sp>
+      <p:sp>
+        <p:nvSpPr>
+          <p:cNvPr id="2079" name="Rectangle 28">
+            <a:extLst>
+              <a:ext uri="{FF2B5EF4-FFF2-40B4-BE49-F238E27FC236}">
+                <a16:creationId xmlns:a16="http://schemas.microsoft.com/office/drawing/2014/main" id="{89AF5CE9-607F-43F4-8983-DCD6DA4051FD}"/>
+              </a:ext>
+              <a:ext uri="{C183D7F6-B498-43B3-948B-1728B52AA6E4}">
+                <adec:decorative xmlns:adec="http://schemas.microsoft.com/office/drawing/2017/decorative" val="1"/>
+              </a:ext>
+            </a:extLst>
+          </p:cNvPr>
+          <p:cNvSpPr>
+            <a:spLocks noGrp="1" noRot="1" noChangeAspect="1" noMove="1" noResize="1" noEditPoints="1" noAdjustHandles="1" noChangeArrowheads="1" noChangeShapeType="1" noTextEdit="1"/>
+          </p:cNvSpPr>
+          <p:nvPr>
+            <p:extLst>
+              <p:ext uri="{386F3935-93C4-4BCD-93E2-E3B085C9AB24}">
+                <p16:designElem xmlns:p16="http://schemas.microsoft.com/office/powerpoint/2015/main" val="1"/>
+              </p:ext>
+            </p:extLst>
+          </p:nvPr>
+        </p:nvSpPr>
+        <p:spPr>
+          <a:xfrm>
+            <a:off x="10898730" y="-8467"/>
+            <a:ext cx="1290094" cy="6866467"/>
+          </a:xfrm>
+          <a:custGeom>
+            <a:avLst/>
+            <a:gdLst/>
+            <a:ahLst/>
+            <a:cxnLst/>
+            <a:rect l="l" t="t" r="r" b="b"/>
+            <a:pathLst>
+              <a:path w="1290094" h="6858000">
+                <a:moveTo>
+                  <a:pt x="1019735" y="0"/>
+                </a:moveTo>
+                <a:lnTo>
+                  <a:pt x="1290094" y="0"/>
+                </a:lnTo>
+                <a:lnTo>
+                  <a:pt x="1290094" y="6858000"/>
+                </a:lnTo>
+                <a:lnTo>
+                  <a:pt x="0" y="6858000"/>
+                </a:lnTo>
+                <a:lnTo>
+                  <a:pt x="1019735" y="0"/>
+                </a:lnTo>
+                <a:close/>
+              </a:path>
+            </a:pathLst>
+          </a:custGeom>
+          <a:solidFill>
+            <a:schemeClr val="accent1">
+              <a:lumMod val="60000"/>
+              <a:lumOff val="40000"/>
+              <a:alpha val="70000"/>
+            </a:schemeClr>
+          </a:solidFill>
+          <a:ln>
+            <a:noFill/>
+          </a:ln>
+          <a:effectLst/>
+        </p:spPr>
+        <p:style>
+          <a:lnRef idx="1">
+            <a:schemeClr val="accent1"/>
+          </a:lnRef>
+          <a:fillRef idx="3">
+            <a:schemeClr val="accent1"/>
+          </a:fillRef>
+          <a:effectRef idx="2">
+            <a:schemeClr val="accent1"/>
+          </a:effectRef>
+          <a:fontRef idx="minor">
+            <a:schemeClr val="lt1"/>
+          </a:fontRef>
+        </p:style>
+      </p:sp>
+      <p:sp>
+        <p:nvSpPr>
+          <p:cNvPr id="2081" name="Rectangle 29">
+            <a:extLst>
+              <a:ext uri="{FF2B5EF4-FFF2-40B4-BE49-F238E27FC236}">
+                <a16:creationId xmlns:a16="http://schemas.microsoft.com/office/drawing/2014/main" id="{6EEA2DBD-9E1E-4521-8C01-F32AD18A89E3}"/>
+              </a:ext>
+              <a:ext uri="{C183D7F6-B498-43B3-948B-1728B52AA6E4}">
+                <adec:decorative xmlns:adec="http://schemas.microsoft.com/office/drawing/2017/decorative" val="1"/>
+              </a:ext>
+            </a:extLst>
+          </p:cNvPr>
+          <p:cNvSpPr>
+            <a:spLocks noGrp="1" noRot="1" noChangeAspect="1" noMove="1" noResize="1" noEditPoints="1" noAdjustHandles="1" noChangeArrowheads="1" noChangeShapeType="1" noTextEdit="1"/>
+          </p:cNvSpPr>
+          <p:nvPr>
+            <p:extLst>
+              <p:ext uri="{386F3935-93C4-4BCD-93E2-E3B085C9AB24}">
+                <p16:designElem xmlns:p16="http://schemas.microsoft.com/office/powerpoint/2015/main" val="1"/>
+              </p:ext>
+            </p:extLst>
+          </p:nvPr>
+        </p:nvSpPr>
+        <p:spPr>
+          <a:xfrm>
+            <a:off x="10938999" y="-8467"/>
+            <a:ext cx="1249825" cy="6866467"/>
+          </a:xfrm>
+          <a:custGeom>
+            <a:avLst/>
+            <a:gdLst/>
+            <a:ahLst/>
+            <a:cxnLst/>
+            <a:rect l="l" t="t" r="r" b="b"/>
+            <a:pathLst>
+              <a:path w="1249825" h="6858000">
+                <a:moveTo>
+                  <a:pt x="0" y="0"/>
+                </a:moveTo>
+                <a:lnTo>
+                  <a:pt x="1249825" y="0"/>
+                </a:lnTo>
+                <a:lnTo>
+                  <a:pt x="1249825" y="6858000"/>
+                </a:lnTo>
+                <a:lnTo>
+                  <a:pt x="1109382" y="6858000"/>
+                </a:lnTo>
+                <a:lnTo>
+                  <a:pt x="0" y="0"/>
+                </a:lnTo>
+                <a:close/>
+              </a:path>
+            </a:pathLst>
+          </a:custGeom>
+          <a:solidFill>
+            <a:schemeClr val="accent1">
+              <a:alpha val="65000"/>
+            </a:schemeClr>
+          </a:solidFill>
+          <a:ln>
+            <a:noFill/>
+          </a:ln>
+          <a:effectLst/>
+        </p:spPr>
+        <p:style>
+          <a:lnRef idx="1">
+            <a:schemeClr val="accent1"/>
+          </a:lnRef>
+          <a:fillRef idx="3">
+            <a:schemeClr val="accent1"/>
+          </a:fillRef>
+          <a:effectRef idx="2">
+            <a:schemeClr val="accent1"/>
+          </a:effectRef>
+          <a:fontRef idx="minor">
+            <a:schemeClr val="lt1"/>
+          </a:fontRef>
+        </p:style>
+      </p:sp>
+      <p:sp>
+        <p:nvSpPr>
+          <p:cNvPr id="2083" name="Isosceles Triangle 29">
+            <a:extLst>
+              <a:ext uri="{FF2B5EF4-FFF2-40B4-BE49-F238E27FC236}">
+                <a16:creationId xmlns:a16="http://schemas.microsoft.com/office/drawing/2014/main" id="{15BBD2C1-BA9B-46A9-A27A-33498B169272}"/>
+              </a:ext>
+              <a:ext uri="{C183D7F6-B498-43B3-948B-1728B52AA6E4}">
+                <adec:decorative xmlns:adec="http://schemas.microsoft.com/office/drawing/2017/decorative" val="1"/>
+              </a:ext>
+            </a:extLst>
+          </p:cNvPr>
+          <p:cNvSpPr>
+            <a:spLocks noGrp="1" noRot="1" noChangeAspect="1" noMove="1" noResize="1" noEditPoints="1" noAdjustHandles="1" noChangeArrowheads="1" noChangeShapeType="1" noTextEdit="1"/>
+          </p:cNvSpPr>
+          <p:nvPr>
+            <p:extLst>
+              <p:ext uri="{386F3935-93C4-4BCD-93E2-E3B085C9AB24}">
+                <p16:designElem xmlns:p16="http://schemas.microsoft.com/office/powerpoint/2015/main" val="1"/>
+              </p:ext>
+            </p:extLst>
+          </p:nvPr>
+        </p:nvSpPr>
+        <p:spPr>
+          <a:xfrm>
+            <a:off x="10371666" y="3589867"/>
+            <a:ext cx="1817159" cy="3268133"/>
+          </a:xfrm>
+          <a:prstGeom prst="triangle">
+            <a:avLst>
+              <a:gd name="adj" fmla="val 100000"/>
+            </a:avLst>
+          </a:prstGeom>
+          <a:solidFill>
+            <a:schemeClr val="accent1">
+              <a:alpha val="80000"/>
+            </a:schemeClr>
+          </a:solidFill>
+          <a:ln>
+            <a:noFill/>
+          </a:ln>
+          <a:effectLst/>
+        </p:spPr>
+        <p:style>
+          <a:lnRef idx="1">
+            <a:schemeClr val="accent1"/>
+          </a:lnRef>
+          <a:fillRef idx="3">
+            <a:schemeClr val="accent1"/>
+          </a:fillRef>
+          <a:effectRef idx="2">
+            <a:schemeClr val="accent1"/>
+          </a:effectRef>
+          <a:fontRef idx="minor">
+            <a:schemeClr val="lt1"/>
+          </a:fontRef>
+        </p:style>
+      </p:sp>
+    </p:spTree>
+    <p:extLst>
+      <p:ext uri="{BB962C8B-B14F-4D97-AF65-F5344CB8AC3E}">
+        <p14:creationId xmlns:p14="http://schemas.microsoft.com/office/powerpoint/2010/main" val="2185680157"/>
       </p:ext>
     </p:extLst>
   </p:cSld>
@@ -25881,1524 +27175,6 @@
 <file path=ppt/slides/slide6.xml><?xml version="1.0" encoding="utf-8"?>
 <p:sld xmlns:a="http://schemas.openxmlformats.org/drawingml/2006/main" xmlns:r="http://schemas.openxmlformats.org/officeDocument/2006/relationships" xmlns:p="http://schemas.openxmlformats.org/presentationml/2006/main">
   <p:cSld>
-    <p:bg>
-      <p:bgPr>
-        <a:solidFill>
-          <a:schemeClr val="bg1"/>
-        </a:solidFill>
-        <a:effectLst/>
-      </p:bgPr>
-    </p:bg>
-    <p:spTree>
-      <p:nvGrpSpPr>
-        <p:cNvPr id="1" name=""/>
-        <p:cNvGrpSpPr/>
-        <p:nvPr/>
-      </p:nvGrpSpPr>
-      <p:grpSpPr>
-        <a:xfrm>
-          <a:off x="0" y="0"/>
-          <a:ext cx="0" cy="0"/>
-          <a:chOff x="0" y="0"/>
-          <a:chExt cx="0" cy="0"/>
-        </a:xfrm>
-      </p:grpSpPr>
-      <p:grpSp>
-        <p:nvGrpSpPr>
-          <p:cNvPr id="2055" name="Group 2054">
-            <a:extLst>
-              <a:ext uri="{FF2B5EF4-FFF2-40B4-BE49-F238E27FC236}">
-                <a16:creationId xmlns:a16="http://schemas.microsoft.com/office/drawing/2014/main" id="{88C9B83F-64CD-41C1-925F-A08801FFD0BD}"/>
-              </a:ext>
-              <a:ext uri="{C183D7F6-B498-43B3-948B-1728B52AA6E4}">
-                <adec:decorative xmlns:adec="http://schemas.microsoft.com/office/drawing/2017/decorative" val="1"/>
-              </a:ext>
-            </a:extLst>
-          </p:cNvPr>
-          <p:cNvGrpSpPr>
-            <a:grpSpLocks noGrp="1" noUngrp="1" noRot="1" noChangeAspect="1" noMove="1" noResize="1"/>
-          </p:cNvGrpSpPr>
-          <p:nvPr>
-            <p:extLst>
-              <p:ext uri="{386F3935-93C4-4BCD-93E2-E3B085C9AB24}">
-                <p16:designElem xmlns:p16="http://schemas.microsoft.com/office/powerpoint/2015/main" val="1"/>
-              </p:ext>
-            </p:extLst>
-          </p:nvPr>
-        </p:nvGrpSpPr>
-        <p:grpSpPr>
-          <a:xfrm>
-            <a:off x="0" y="-8467"/>
-            <a:ext cx="12192000" cy="6866467"/>
-            <a:chOff x="0" y="-8467"/>
-            <a:chExt cx="12192000" cy="6866467"/>
-          </a:xfrm>
-        </p:grpSpPr>
-        <p:cxnSp>
-          <p:nvCxnSpPr>
-            <p:cNvPr id="2056" name="Straight Connector 2055">
-              <a:extLst>
-                <a:ext uri="{FF2B5EF4-FFF2-40B4-BE49-F238E27FC236}">
-                  <a16:creationId xmlns:a16="http://schemas.microsoft.com/office/drawing/2014/main" id="{E1655065-0BD7-4422-BEC0-4401E998090A}"/>
-                </a:ext>
-                <a:ext uri="{C183D7F6-B498-43B3-948B-1728B52AA6E4}">
-                  <adec:decorative xmlns:adec="http://schemas.microsoft.com/office/drawing/2017/decorative" val="1"/>
-                </a:ext>
-              </a:extLst>
-            </p:cNvPr>
-            <p:cNvCxnSpPr/>
-            <p:nvPr>
-              <p:extLst>
-                <p:ext uri="{386F3935-93C4-4BCD-93E2-E3B085C9AB24}">
-                  <p16:designElem xmlns:p16="http://schemas.microsoft.com/office/powerpoint/2015/main" val="1"/>
-                </p:ext>
-              </p:extLst>
-            </p:nvPr>
-          </p:nvCxnSpPr>
-          <p:spPr>
-            <a:xfrm>
-              <a:off x="9371012" y="0"/>
-              <a:ext cx="1219200" cy="6858000"/>
-            </a:xfrm>
-            <a:prstGeom prst="line">
-              <a:avLst/>
-            </a:prstGeom>
-            <a:ln w="9525">
-              <a:solidFill>
-                <a:schemeClr val="bg1">
-                  <a:lumMod val="75000"/>
-                </a:schemeClr>
-              </a:solidFill>
-            </a:ln>
-          </p:spPr>
-          <p:style>
-            <a:lnRef idx="2">
-              <a:schemeClr val="accent1"/>
-            </a:lnRef>
-            <a:fillRef idx="0">
-              <a:schemeClr val="accent1"/>
-            </a:fillRef>
-            <a:effectRef idx="1">
-              <a:schemeClr val="accent1"/>
-            </a:effectRef>
-            <a:fontRef idx="minor">
-              <a:schemeClr val="tx1"/>
-            </a:fontRef>
-          </p:style>
-        </p:cxnSp>
-        <p:cxnSp>
-          <p:nvCxnSpPr>
-            <p:cNvPr id="2057" name="Straight Connector 2056">
-              <a:extLst>
-                <a:ext uri="{FF2B5EF4-FFF2-40B4-BE49-F238E27FC236}">
-                  <a16:creationId xmlns:a16="http://schemas.microsoft.com/office/drawing/2014/main" id="{4DDD90AC-ABEC-4A76-9C9C-AD0A5F8FC7F2}"/>
-                </a:ext>
-                <a:ext uri="{C183D7F6-B498-43B3-948B-1728B52AA6E4}">
-                  <adec:decorative xmlns:adec="http://schemas.microsoft.com/office/drawing/2017/decorative" val="1"/>
-                </a:ext>
-              </a:extLst>
-            </p:cNvPr>
-            <p:cNvCxnSpPr/>
-            <p:nvPr>
-              <p:extLst>
-                <p:ext uri="{386F3935-93C4-4BCD-93E2-E3B085C9AB24}">
-                  <p16:designElem xmlns:p16="http://schemas.microsoft.com/office/powerpoint/2015/main" val="1"/>
-                </p:ext>
-              </p:extLst>
-            </p:nvPr>
-          </p:nvCxnSpPr>
-          <p:spPr>
-            <a:xfrm flipH="1">
-              <a:off x="7425267" y="3681413"/>
-              <a:ext cx="4763558" cy="3176587"/>
-            </a:xfrm>
-            <a:prstGeom prst="line">
-              <a:avLst/>
-            </a:prstGeom>
-            <a:ln w="9525">
-              <a:solidFill>
-                <a:schemeClr val="bg1">
-                  <a:lumMod val="85000"/>
-                </a:schemeClr>
-              </a:solidFill>
-            </a:ln>
-          </p:spPr>
-          <p:style>
-            <a:lnRef idx="2">
-              <a:schemeClr val="accent1"/>
-            </a:lnRef>
-            <a:fillRef idx="0">
-              <a:schemeClr val="accent1"/>
-            </a:fillRef>
-            <a:effectRef idx="1">
-              <a:schemeClr val="accent1"/>
-            </a:effectRef>
-            <a:fontRef idx="minor">
-              <a:schemeClr val="tx1"/>
-            </a:fontRef>
-          </p:style>
-        </p:cxnSp>
-        <p:sp>
-          <p:nvSpPr>
-            <p:cNvPr id="2058" name="Rectangle 23">
-              <a:extLst>
-                <a:ext uri="{FF2B5EF4-FFF2-40B4-BE49-F238E27FC236}">
-                  <a16:creationId xmlns:a16="http://schemas.microsoft.com/office/drawing/2014/main" id="{21A8AFEF-EC50-4C0B-9C64-814B76C82090}"/>
-                </a:ext>
-                <a:ext uri="{C183D7F6-B498-43B3-948B-1728B52AA6E4}">
-                  <adec:decorative xmlns:adec="http://schemas.microsoft.com/office/drawing/2017/decorative" val="1"/>
-                </a:ext>
-              </a:extLst>
-            </p:cNvPr>
-            <p:cNvSpPr/>
-            <p:nvPr>
-              <p:extLst>
-                <p:ext uri="{386F3935-93C4-4BCD-93E2-E3B085C9AB24}">
-                  <p16:designElem xmlns:p16="http://schemas.microsoft.com/office/powerpoint/2015/main" val="1"/>
-                </p:ext>
-              </p:extLst>
-            </p:nvPr>
-          </p:nvSpPr>
-          <p:spPr>
-            <a:xfrm>
-              <a:off x="9181476" y="-8467"/>
-              <a:ext cx="3007349" cy="6866467"/>
-            </a:xfrm>
-            <a:custGeom>
-              <a:avLst/>
-              <a:gdLst/>
-              <a:ahLst/>
-              <a:cxnLst/>
-              <a:rect l="l" t="t" r="r" b="b"/>
-              <a:pathLst>
-                <a:path w="3007349" h="6866467">
-                  <a:moveTo>
-                    <a:pt x="2045532" y="0"/>
-                  </a:moveTo>
-                  <a:lnTo>
-                    <a:pt x="3007349" y="0"/>
-                  </a:lnTo>
-                  <a:lnTo>
-                    <a:pt x="3007349" y="6866467"/>
-                  </a:lnTo>
-                  <a:lnTo>
-                    <a:pt x="0" y="6866467"/>
-                  </a:lnTo>
-                  <a:lnTo>
-                    <a:pt x="2045532" y="0"/>
-                  </a:lnTo>
-                  <a:close/>
-                </a:path>
-              </a:pathLst>
-            </a:custGeom>
-            <a:solidFill>
-              <a:schemeClr val="accent1">
-                <a:alpha val="30000"/>
-              </a:schemeClr>
-            </a:solidFill>
-            <a:ln>
-              <a:noFill/>
-            </a:ln>
-            <a:effectLst/>
-          </p:spPr>
-          <p:style>
-            <a:lnRef idx="1">
-              <a:schemeClr val="accent1"/>
-            </a:lnRef>
-            <a:fillRef idx="3">
-              <a:schemeClr val="accent1"/>
-            </a:fillRef>
-            <a:effectRef idx="2">
-              <a:schemeClr val="accent1"/>
-            </a:effectRef>
-            <a:fontRef idx="minor">
-              <a:schemeClr val="lt1"/>
-            </a:fontRef>
-          </p:style>
-        </p:sp>
-        <p:sp>
-          <p:nvSpPr>
-            <p:cNvPr id="2059" name="Rectangle 25">
-              <a:extLst>
-                <a:ext uri="{FF2B5EF4-FFF2-40B4-BE49-F238E27FC236}">
-                  <a16:creationId xmlns:a16="http://schemas.microsoft.com/office/drawing/2014/main" id="{CAFAA800-E117-4357-84E4-56B63EA03E37}"/>
-                </a:ext>
-                <a:ext uri="{C183D7F6-B498-43B3-948B-1728B52AA6E4}">
-                  <adec:decorative xmlns:adec="http://schemas.microsoft.com/office/drawing/2017/decorative" val="1"/>
-                </a:ext>
-              </a:extLst>
-            </p:cNvPr>
-            <p:cNvSpPr/>
-            <p:nvPr>
-              <p:extLst>
-                <p:ext uri="{386F3935-93C4-4BCD-93E2-E3B085C9AB24}">
-                  <p16:designElem xmlns:p16="http://schemas.microsoft.com/office/powerpoint/2015/main" val="1"/>
-                </p:ext>
-              </p:extLst>
-            </p:nvPr>
-          </p:nvSpPr>
-          <p:spPr>
-            <a:xfrm>
-              <a:off x="9603442" y="-8467"/>
-              <a:ext cx="2588558" cy="6866467"/>
-            </a:xfrm>
-            <a:custGeom>
-              <a:avLst/>
-              <a:gdLst/>
-              <a:ahLst/>
-              <a:cxnLst/>
-              <a:rect l="l" t="t" r="r" b="b"/>
-              <a:pathLst>
-                <a:path w="2573311" h="6866467">
-                  <a:moveTo>
-                    <a:pt x="0" y="0"/>
-                  </a:moveTo>
-                  <a:lnTo>
-                    <a:pt x="2573311" y="0"/>
-                  </a:lnTo>
-                  <a:lnTo>
-                    <a:pt x="2573311" y="6866467"/>
-                  </a:lnTo>
-                  <a:lnTo>
-                    <a:pt x="1202336" y="6866467"/>
-                  </a:lnTo>
-                  <a:lnTo>
-                    <a:pt x="0" y="0"/>
-                  </a:lnTo>
-                  <a:close/>
-                </a:path>
-              </a:pathLst>
-            </a:custGeom>
-            <a:solidFill>
-              <a:schemeClr val="accent1">
-                <a:alpha val="20000"/>
-              </a:schemeClr>
-            </a:solidFill>
-            <a:ln>
-              <a:noFill/>
-            </a:ln>
-            <a:effectLst/>
-          </p:spPr>
-          <p:style>
-            <a:lnRef idx="1">
-              <a:schemeClr val="accent1"/>
-            </a:lnRef>
-            <a:fillRef idx="3">
-              <a:schemeClr val="accent1"/>
-            </a:fillRef>
-            <a:effectRef idx="2">
-              <a:schemeClr val="accent1"/>
-            </a:effectRef>
-            <a:fontRef idx="minor">
-              <a:schemeClr val="lt1"/>
-            </a:fontRef>
-          </p:style>
-        </p:sp>
-        <p:sp>
-          <p:nvSpPr>
-            <p:cNvPr id="2060" name="Isosceles Triangle 2059">
-              <a:extLst>
-                <a:ext uri="{FF2B5EF4-FFF2-40B4-BE49-F238E27FC236}">
-                  <a16:creationId xmlns:a16="http://schemas.microsoft.com/office/drawing/2014/main" id="{8DDFC9F4-3B45-402D-8AD7-60B3F08ED755}"/>
-                </a:ext>
-                <a:ext uri="{C183D7F6-B498-43B3-948B-1728B52AA6E4}">
-                  <adec:decorative xmlns:adec="http://schemas.microsoft.com/office/drawing/2017/decorative" val="1"/>
-                </a:ext>
-              </a:extLst>
-            </p:cNvPr>
-            <p:cNvSpPr/>
-            <p:nvPr>
-              <p:extLst>
-                <p:ext uri="{386F3935-93C4-4BCD-93E2-E3B085C9AB24}">
-                  <p16:designElem xmlns:p16="http://schemas.microsoft.com/office/powerpoint/2015/main" val="1"/>
-                </p:ext>
-              </p:extLst>
-            </p:nvPr>
-          </p:nvSpPr>
-          <p:spPr>
-            <a:xfrm>
-              <a:off x="8932333" y="3048000"/>
-              <a:ext cx="3259667" cy="3810000"/>
-            </a:xfrm>
-            <a:prstGeom prst="triangle">
-              <a:avLst>
-                <a:gd name="adj" fmla="val 100000"/>
-              </a:avLst>
-            </a:prstGeom>
-            <a:solidFill>
-              <a:schemeClr val="accent2">
-                <a:alpha val="72000"/>
-              </a:schemeClr>
-            </a:solidFill>
-            <a:ln>
-              <a:noFill/>
-            </a:ln>
-            <a:effectLst/>
-          </p:spPr>
-          <p:style>
-            <a:lnRef idx="1">
-              <a:schemeClr val="accent1"/>
-            </a:lnRef>
-            <a:fillRef idx="3">
-              <a:schemeClr val="accent1"/>
-            </a:fillRef>
-            <a:effectRef idx="2">
-              <a:schemeClr val="accent1"/>
-            </a:effectRef>
-            <a:fontRef idx="minor">
-              <a:schemeClr val="lt1"/>
-            </a:fontRef>
-          </p:style>
-        </p:sp>
-        <p:sp>
-          <p:nvSpPr>
-            <p:cNvPr id="2061" name="Rectangle 27">
-              <a:extLst>
-                <a:ext uri="{FF2B5EF4-FFF2-40B4-BE49-F238E27FC236}">
-                  <a16:creationId xmlns:a16="http://schemas.microsoft.com/office/drawing/2014/main" id="{F26A0854-FBE4-4587-B349-06BE192BD7F6}"/>
-                </a:ext>
-                <a:ext uri="{C183D7F6-B498-43B3-948B-1728B52AA6E4}">
-                  <adec:decorative xmlns:adec="http://schemas.microsoft.com/office/drawing/2017/decorative" val="1"/>
-                </a:ext>
-              </a:extLst>
-            </p:cNvPr>
-            <p:cNvSpPr/>
-            <p:nvPr>
-              <p:extLst>
-                <p:ext uri="{386F3935-93C4-4BCD-93E2-E3B085C9AB24}">
-                  <p16:designElem xmlns:p16="http://schemas.microsoft.com/office/powerpoint/2015/main" val="1"/>
-                </p:ext>
-              </p:extLst>
-            </p:nvPr>
-          </p:nvSpPr>
-          <p:spPr>
-            <a:xfrm>
-              <a:off x="9334500" y="-8467"/>
-              <a:ext cx="2854326" cy="6866467"/>
-            </a:xfrm>
-            <a:custGeom>
-              <a:avLst/>
-              <a:gdLst/>
-              <a:ahLst/>
-              <a:cxnLst/>
-              <a:rect l="l" t="t" r="r" b="b"/>
-              <a:pathLst>
-                <a:path w="2858013" h="6866467">
-                  <a:moveTo>
-                    <a:pt x="0" y="0"/>
-                  </a:moveTo>
-                  <a:lnTo>
-                    <a:pt x="2858013" y="0"/>
-                  </a:lnTo>
-                  <a:lnTo>
-                    <a:pt x="2858013" y="6866467"/>
-                  </a:lnTo>
-                  <a:lnTo>
-                    <a:pt x="2473942" y="6866467"/>
-                  </a:lnTo>
-                  <a:lnTo>
-                    <a:pt x="0" y="0"/>
-                  </a:lnTo>
-                  <a:close/>
-                </a:path>
-              </a:pathLst>
-            </a:custGeom>
-            <a:solidFill>
-              <a:schemeClr val="accent2">
-                <a:lumMod val="75000"/>
-                <a:alpha val="70000"/>
-              </a:schemeClr>
-            </a:solidFill>
-            <a:ln>
-              <a:noFill/>
-            </a:ln>
-            <a:effectLst/>
-          </p:spPr>
-          <p:style>
-            <a:lnRef idx="1">
-              <a:schemeClr val="accent1"/>
-            </a:lnRef>
-            <a:fillRef idx="3">
-              <a:schemeClr val="accent1"/>
-            </a:fillRef>
-            <a:effectRef idx="2">
-              <a:schemeClr val="accent1"/>
-            </a:effectRef>
-            <a:fontRef idx="minor">
-              <a:schemeClr val="lt1"/>
-            </a:fontRef>
-          </p:style>
-        </p:sp>
-        <p:sp>
-          <p:nvSpPr>
-            <p:cNvPr id="2062" name="Rectangle 28">
-              <a:extLst>
-                <a:ext uri="{FF2B5EF4-FFF2-40B4-BE49-F238E27FC236}">
-                  <a16:creationId xmlns:a16="http://schemas.microsoft.com/office/drawing/2014/main" id="{54A9C4C6-FF7D-470E-BFCA-CE4F60A1F0A8}"/>
-                </a:ext>
-                <a:ext uri="{C183D7F6-B498-43B3-948B-1728B52AA6E4}">
-                  <adec:decorative xmlns:adec="http://schemas.microsoft.com/office/drawing/2017/decorative" val="1"/>
-                </a:ext>
-              </a:extLst>
-            </p:cNvPr>
-            <p:cNvSpPr/>
-            <p:nvPr>
-              <p:extLst>
-                <p:ext uri="{386F3935-93C4-4BCD-93E2-E3B085C9AB24}">
-                  <p16:designElem xmlns:p16="http://schemas.microsoft.com/office/powerpoint/2015/main" val="1"/>
-                </p:ext>
-              </p:extLst>
-            </p:nvPr>
-          </p:nvSpPr>
-          <p:spPr>
-            <a:xfrm>
-              <a:off x="10898730" y="-8467"/>
-              <a:ext cx="1290094" cy="6866467"/>
-            </a:xfrm>
-            <a:custGeom>
-              <a:avLst/>
-              <a:gdLst/>
-              <a:ahLst/>
-              <a:cxnLst/>
-              <a:rect l="l" t="t" r="r" b="b"/>
-              <a:pathLst>
-                <a:path w="1290094" h="6858000">
-                  <a:moveTo>
-                    <a:pt x="1019735" y="0"/>
-                  </a:moveTo>
-                  <a:lnTo>
-                    <a:pt x="1290094" y="0"/>
-                  </a:lnTo>
-                  <a:lnTo>
-                    <a:pt x="1290094" y="6858000"/>
-                  </a:lnTo>
-                  <a:lnTo>
-                    <a:pt x="0" y="6858000"/>
-                  </a:lnTo>
-                  <a:lnTo>
-                    <a:pt x="1019735" y="0"/>
-                  </a:lnTo>
-                  <a:close/>
-                </a:path>
-              </a:pathLst>
-            </a:custGeom>
-            <a:solidFill>
-              <a:schemeClr val="accent1">
-                <a:lumMod val="60000"/>
-                <a:lumOff val="40000"/>
-                <a:alpha val="70000"/>
-              </a:schemeClr>
-            </a:solidFill>
-            <a:ln>
-              <a:noFill/>
-            </a:ln>
-            <a:effectLst/>
-          </p:spPr>
-          <p:style>
-            <a:lnRef idx="1">
-              <a:schemeClr val="accent1"/>
-            </a:lnRef>
-            <a:fillRef idx="3">
-              <a:schemeClr val="accent1"/>
-            </a:fillRef>
-            <a:effectRef idx="2">
-              <a:schemeClr val="accent1"/>
-            </a:effectRef>
-            <a:fontRef idx="minor">
-              <a:schemeClr val="lt1"/>
-            </a:fontRef>
-          </p:style>
-        </p:sp>
-        <p:sp>
-          <p:nvSpPr>
-            <p:cNvPr id="2063" name="Rectangle 29">
-              <a:extLst>
-                <a:ext uri="{FF2B5EF4-FFF2-40B4-BE49-F238E27FC236}">
-                  <a16:creationId xmlns:a16="http://schemas.microsoft.com/office/drawing/2014/main" id="{B1721EA8-4871-45D4-B78F-AE805A3004B1}"/>
-                </a:ext>
-                <a:ext uri="{C183D7F6-B498-43B3-948B-1728B52AA6E4}">
-                  <adec:decorative xmlns:adec="http://schemas.microsoft.com/office/drawing/2017/decorative" val="1"/>
-                </a:ext>
-              </a:extLst>
-            </p:cNvPr>
-            <p:cNvSpPr/>
-            <p:nvPr>
-              <p:extLst>
-                <p:ext uri="{386F3935-93C4-4BCD-93E2-E3B085C9AB24}">
-                  <p16:designElem xmlns:p16="http://schemas.microsoft.com/office/powerpoint/2015/main" val="1"/>
-                </p:ext>
-              </p:extLst>
-            </p:nvPr>
-          </p:nvSpPr>
-          <p:spPr>
-            <a:xfrm>
-              <a:off x="10938999" y="-8467"/>
-              <a:ext cx="1249825" cy="6866467"/>
-            </a:xfrm>
-            <a:custGeom>
-              <a:avLst/>
-              <a:gdLst/>
-              <a:ahLst/>
-              <a:cxnLst/>
-              <a:rect l="l" t="t" r="r" b="b"/>
-              <a:pathLst>
-                <a:path w="1249825" h="6858000">
-                  <a:moveTo>
-                    <a:pt x="0" y="0"/>
-                  </a:moveTo>
-                  <a:lnTo>
-                    <a:pt x="1249825" y="0"/>
-                  </a:lnTo>
-                  <a:lnTo>
-                    <a:pt x="1249825" y="6858000"/>
-                  </a:lnTo>
-                  <a:lnTo>
-                    <a:pt x="1109382" y="6858000"/>
-                  </a:lnTo>
-                  <a:lnTo>
-                    <a:pt x="0" y="0"/>
-                  </a:lnTo>
-                  <a:close/>
-                </a:path>
-              </a:pathLst>
-            </a:custGeom>
-            <a:solidFill>
-              <a:schemeClr val="accent1">
-                <a:alpha val="65000"/>
-              </a:schemeClr>
-            </a:solidFill>
-            <a:ln>
-              <a:noFill/>
-            </a:ln>
-            <a:effectLst/>
-          </p:spPr>
-          <p:style>
-            <a:lnRef idx="1">
-              <a:schemeClr val="accent1"/>
-            </a:lnRef>
-            <a:fillRef idx="3">
-              <a:schemeClr val="accent1"/>
-            </a:fillRef>
-            <a:effectRef idx="2">
-              <a:schemeClr val="accent1"/>
-            </a:effectRef>
-            <a:fontRef idx="minor">
-              <a:schemeClr val="lt1"/>
-            </a:fontRef>
-          </p:style>
-        </p:sp>
-        <p:sp>
-          <p:nvSpPr>
-            <p:cNvPr id="2064" name="Isosceles Triangle 2063">
-              <a:extLst>
-                <a:ext uri="{FF2B5EF4-FFF2-40B4-BE49-F238E27FC236}">
-                  <a16:creationId xmlns:a16="http://schemas.microsoft.com/office/drawing/2014/main" id="{E5763971-E3A3-45C6-9BA8-2E032C7A55EB}"/>
-                </a:ext>
-                <a:ext uri="{C183D7F6-B498-43B3-948B-1728B52AA6E4}">
-                  <adec:decorative xmlns:adec="http://schemas.microsoft.com/office/drawing/2017/decorative" val="1"/>
-                </a:ext>
-              </a:extLst>
-            </p:cNvPr>
-            <p:cNvSpPr/>
-            <p:nvPr>
-              <p:extLst>
-                <p:ext uri="{386F3935-93C4-4BCD-93E2-E3B085C9AB24}">
-                  <p16:designElem xmlns:p16="http://schemas.microsoft.com/office/powerpoint/2015/main" val="1"/>
-                </p:ext>
-              </p:extLst>
-            </p:nvPr>
-          </p:nvSpPr>
-          <p:spPr>
-            <a:xfrm>
-              <a:off x="10371666" y="3589867"/>
-              <a:ext cx="1817159" cy="3268133"/>
-            </a:xfrm>
-            <a:prstGeom prst="triangle">
-              <a:avLst>
-                <a:gd name="adj" fmla="val 100000"/>
-              </a:avLst>
-            </a:prstGeom>
-            <a:solidFill>
-              <a:schemeClr val="accent1">
-                <a:alpha val="80000"/>
-              </a:schemeClr>
-            </a:solidFill>
-            <a:ln>
-              <a:noFill/>
-            </a:ln>
-            <a:effectLst/>
-          </p:spPr>
-          <p:style>
-            <a:lnRef idx="1">
-              <a:schemeClr val="accent1"/>
-            </a:lnRef>
-            <a:fillRef idx="3">
-              <a:schemeClr val="accent1"/>
-            </a:fillRef>
-            <a:effectRef idx="2">
-              <a:schemeClr val="accent1"/>
-            </a:effectRef>
-            <a:fontRef idx="minor">
-              <a:schemeClr val="lt1"/>
-            </a:fontRef>
-          </p:style>
-        </p:sp>
-        <p:sp>
-          <p:nvSpPr>
-            <p:cNvPr id="2065" name="Isosceles Triangle 2064">
-              <a:extLst>
-                <a:ext uri="{FF2B5EF4-FFF2-40B4-BE49-F238E27FC236}">
-                  <a16:creationId xmlns:a16="http://schemas.microsoft.com/office/drawing/2014/main" id="{32752E94-0E01-4AF5-A43A-F2FAD8737C29}"/>
-                </a:ext>
-                <a:ext uri="{C183D7F6-B498-43B3-948B-1728B52AA6E4}">
-                  <adec:decorative xmlns:adec="http://schemas.microsoft.com/office/drawing/2017/decorative" val="1"/>
-                </a:ext>
-              </a:extLst>
-            </p:cNvPr>
-            <p:cNvSpPr/>
-            <p:nvPr>
-              <p:extLst>
-                <p:ext uri="{386F3935-93C4-4BCD-93E2-E3B085C9AB24}">
-                  <p16:designElem xmlns:p16="http://schemas.microsoft.com/office/powerpoint/2015/main" val="1"/>
-                </p:ext>
-              </p:extLst>
-            </p:nvPr>
-          </p:nvSpPr>
-          <p:spPr>
-            <a:xfrm rot="10800000">
-              <a:off x="0" y="0"/>
-              <a:ext cx="842596" cy="5666154"/>
-            </a:xfrm>
-            <a:prstGeom prst="triangle">
-              <a:avLst>
-                <a:gd name="adj" fmla="val 100000"/>
-              </a:avLst>
-            </a:prstGeom>
-            <a:solidFill>
-              <a:schemeClr val="accent1">
-                <a:alpha val="85000"/>
-              </a:schemeClr>
-            </a:solidFill>
-            <a:ln>
-              <a:noFill/>
-            </a:ln>
-            <a:effectLst/>
-          </p:spPr>
-          <p:style>
-            <a:lnRef idx="1">
-              <a:schemeClr val="accent1"/>
-            </a:lnRef>
-            <a:fillRef idx="3">
-              <a:schemeClr val="accent1"/>
-            </a:fillRef>
-            <a:effectRef idx="2">
-              <a:schemeClr val="accent1"/>
-            </a:effectRef>
-            <a:fontRef idx="minor">
-              <a:schemeClr val="lt1"/>
-            </a:fontRef>
-          </p:style>
-        </p:sp>
-      </p:grpSp>
-      <p:pic>
-        <p:nvPicPr>
-          <p:cNvPr id="2050" name="Picture 2">
-            <a:extLst>
-              <a:ext uri="{FF2B5EF4-FFF2-40B4-BE49-F238E27FC236}">
-                <a16:creationId xmlns:a16="http://schemas.microsoft.com/office/drawing/2014/main" id="{6FB4FC6E-084D-BD48-F2AC-3545C154C57F}"/>
-              </a:ext>
-            </a:extLst>
-          </p:cNvPr>
-          <p:cNvPicPr>
-            <a:picLocks noGrp="1" noChangeAspect="1" noChangeArrowheads="1"/>
-          </p:cNvPicPr>
-          <p:nvPr>
-            <p:ph idx="1"/>
-          </p:nvPr>
-        </p:nvPicPr>
-        <p:blipFill rotWithShape="1">
-          <a:blip r:embed="rId2">
-            <a:extLst>
-              <a:ext uri="{28A0092B-C50C-407E-A947-70E740481C1C}">
-                <a14:useLocalDpi xmlns:a14="http://schemas.microsoft.com/office/drawing/2010/main" val="0"/>
-              </a:ext>
-            </a:extLst>
-          </a:blip>
-          <a:srcRect l="1076" t="9095" r="8013" b="29323"/>
-          <a:stretch/>
-        </p:blipFill>
-        <p:spPr bwMode="auto">
-          <a:xfrm>
-            <a:off x="4269854" y="-1"/>
-            <a:ext cx="7922146" cy="6858001"/>
-          </a:xfrm>
-          <a:custGeom>
-            <a:avLst/>
-            <a:gdLst/>
-            <a:ahLst/>
-            <a:cxnLst/>
-            <a:rect l="l" t="t" r="r" b="b"/>
-            <a:pathLst>
-              <a:path w="7922146" h="6858001">
-                <a:moveTo>
-                  <a:pt x="379987" y="0"/>
-                </a:moveTo>
-                <a:lnTo>
-                  <a:pt x="5304971" y="0"/>
-                </a:lnTo>
-                <a:lnTo>
-                  <a:pt x="7065281" y="0"/>
-                </a:lnTo>
-                <a:lnTo>
-                  <a:pt x="7397540" y="0"/>
-                </a:lnTo>
-                <a:lnTo>
-                  <a:pt x="7397540" y="1"/>
-                </a:lnTo>
-                <a:lnTo>
-                  <a:pt x="7922146" y="1"/>
-                </a:lnTo>
-                <a:lnTo>
-                  <a:pt x="7922146" y="6858001"/>
-                </a:lnTo>
-                <a:lnTo>
-                  <a:pt x="7065281" y="6858001"/>
-                </a:lnTo>
-                <a:lnTo>
-                  <a:pt x="7065281" y="6858000"/>
-                </a:lnTo>
-                <a:lnTo>
-                  <a:pt x="5932989" y="6858000"/>
-                </a:lnTo>
-                <a:lnTo>
-                  <a:pt x="5932989" y="6858001"/>
-                </a:lnTo>
-                <a:lnTo>
-                  <a:pt x="27809" y="6858001"/>
-                </a:lnTo>
-                <a:lnTo>
-                  <a:pt x="1803228" y="4521201"/>
-                </a:lnTo>
-                <a:close/>
-                <a:moveTo>
-                  <a:pt x="0" y="0"/>
-                </a:moveTo>
-                <a:lnTo>
-                  <a:pt x="379987" y="0"/>
-                </a:lnTo>
-                <a:lnTo>
-                  <a:pt x="0" y="407"/>
-                </a:lnTo>
-                <a:close/>
-              </a:path>
-            </a:pathLst>
-          </a:custGeom>
-          <a:noFill/>
-          <a:extLst>
-            <a:ext uri="{909E8E84-426E-40DD-AFC4-6F175D3DCCD1}">
-              <a14:hiddenFill xmlns:a14="http://schemas.microsoft.com/office/drawing/2010/main">
-                <a:solidFill>
-                  <a:srgbClr val="FFFFFF"/>
-                </a:solidFill>
-              </a14:hiddenFill>
-            </a:ext>
-          </a:extLst>
-        </p:spPr>
-      </p:pic>
-      <p:sp>
-        <p:nvSpPr>
-          <p:cNvPr id="2" name="Title 1">
-            <a:extLst>
-              <a:ext uri="{FF2B5EF4-FFF2-40B4-BE49-F238E27FC236}">
-                <a16:creationId xmlns:a16="http://schemas.microsoft.com/office/drawing/2014/main" id="{85E43715-2ACB-6BCA-DBAD-75FEFAD18245}"/>
-              </a:ext>
-            </a:extLst>
-          </p:cNvPr>
-          <p:cNvSpPr>
-            <a:spLocks noGrp="1"/>
-          </p:cNvSpPr>
-          <p:nvPr>
-            <p:ph type="title"/>
-          </p:nvPr>
-        </p:nvSpPr>
-        <p:spPr>
-          <a:xfrm>
-            <a:off x="668867" y="1191846"/>
-            <a:ext cx="4088190" cy="4846815"/>
-          </a:xfrm>
-        </p:spPr>
-        <p:txBody>
-          <a:bodyPr vert="horz" lIns="91440" tIns="45720" rIns="91440" bIns="45720" rtlCol="0" anchor="b">
-            <a:normAutofit/>
-          </a:bodyPr>
-          <a:lstStyle/>
-          <a:p>
-            <a:pPr algn="ctr"/>
-            <a:r>
-              <a:rPr lang="pl-PL" sz="4800" dirty="0"/>
-              <a:t>Czy poprawna metodologia jest decydująca?</a:t>
-            </a:r>
-            <a:br>
-              <a:rPr lang="pl-PL" sz="4800"/>
-            </a:br>
-            <a:br>
-              <a:rPr lang="pl-PL" sz="4800" dirty="0"/>
-            </a:br>
-            <a:r>
-              <a:rPr lang="pl-PL" sz="4800" dirty="0"/>
-              <a:t>Alfred </a:t>
-            </a:r>
-            <a:r>
-              <a:rPr lang="pl-PL" sz="4800" dirty="0" err="1"/>
-              <a:t>Kinsley</a:t>
-            </a:r>
-            <a:endParaRPr lang="en-US" sz="4800" dirty="0"/>
-          </a:p>
-        </p:txBody>
-      </p:sp>
-      <p:cxnSp>
-        <p:nvCxnSpPr>
-          <p:cNvPr id="2067" name="Straight Connector 2066">
-            <a:extLst>
-              <a:ext uri="{FF2B5EF4-FFF2-40B4-BE49-F238E27FC236}">
-                <a16:creationId xmlns:a16="http://schemas.microsoft.com/office/drawing/2014/main" id="{A57C1A16-B8AB-4D99-A195-A38F556A6486}"/>
-              </a:ext>
-              <a:ext uri="{C183D7F6-B498-43B3-948B-1728B52AA6E4}">
-                <adec:decorative xmlns:adec="http://schemas.microsoft.com/office/drawing/2017/decorative" val="1"/>
-              </a:ext>
-            </a:extLst>
-          </p:cNvPr>
-          <p:cNvCxnSpPr>
-            <a:cxnSpLocks noGrp="1" noRot="1" noChangeAspect="1" noMove="1" noResize="1" noEditPoints="1" noAdjustHandles="1" noChangeArrowheads="1" noChangeShapeType="1"/>
-          </p:cNvCxnSpPr>
-          <p:nvPr>
-            <p:extLst>
-              <p:ext uri="{386F3935-93C4-4BCD-93E2-E3B085C9AB24}">
-                <p16:designElem xmlns:p16="http://schemas.microsoft.com/office/powerpoint/2015/main" val="1"/>
-              </p:ext>
-            </p:extLst>
-          </p:nvPr>
-        </p:nvCxnSpPr>
-        <p:spPr>
-          <a:xfrm>
-            <a:off x="9371012" y="0"/>
-            <a:ext cx="1219200" cy="6858000"/>
-          </a:xfrm>
-          <a:prstGeom prst="line">
-            <a:avLst/>
-          </a:prstGeom>
-          <a:ln w="9525">
-            <a:solidFill>
-              <a:schemeClr val="bg1">
-                <a:lumMod val="75000"/>
-              </a:schemeClr>
-            </a:solidFill>
-          </a:ln>
-        </p:spPr>
-        <p:style>
-          <a:lnRef idx="2">
-            <a:schemeClr val="accent1"/>
-          </a:lnRef>
-          <a:fillRef idx="0">
-            <a:schemeClr val="accent1"/>
-          </a:fillRef>
-          <a:effectRef idx="1">
-            <a:schemeClr val="accent1"/>
-          </a:effectRef>
-          <a:fontRef idx="minor">
-            <a:schemeClr val="tx1"/>
-          </a:fontRef>
-        </p:style>
-      </p:cxnSp>
-      <p:cxnSp>
-        <p:nvCxnSpPr>
-          <p:cNvPr id="2069" name="Straight Connector 2068">
-            <a:extLst>
-              <a:ext uri="{FF2B5EF4-FFF2-40B4-BE49-F238E27FC236}">
-                <a16:creationId xmlns:a16="http://schemas.microsoft.com/office/drawing/2014/main" id="{F8A9B20B-D1DD-4573-B5EC-558029519236}"/>
-              </a:ext>
-              <a:ext uri="{C183D7F6-B498-43B3-948B-1728B52AA6E4}">
-                <adec:decorative xmlns:adec="http://schemas.microsoft.com/office/drawing/2017/decorative" val="1"/>
-              </a:ext>
-            </a:extLst>
-          </p:cNvPr>
-          <p:cNvCxnSpPr>
-            <a:cxnSpLocks noGrp="1" noRot="1" noChangeAspect="1" noMove="1" noResize="1" noEditPoints="1" noAdjustHandles="1" noChangeArrowheads="1" noChangeShapeType="1"/>
-          </p:cNvCxnSpPr>
-          <p:nvPr>
-            <p:extLst>
-              <p:ext uri="{386F3935-93C4-4BCD-93E2-E3B085C9AB24}">
-                <p16:designElem xmlns:p16="http://schemas.microsoft.com/office/powerpoint/2015/main" val="1"/>
-              </p:ext>
-            </p:extLst>
-          </p:nvPr>
-        </p:nvCxnSpPr>
-        <p:spPr>
-          <a:xfrm flipH="1">
-            <a:off x="7425267" y="3681413"/>
-            <a:ext cx="4763558" cy="3176587"/>
-          </a:xfrm>
-          <a:prstGeom prst="line">
-            <a:avLst/>
-          </a:prstGeom>
-          <a:ln w="9525">
-            <a:solidFill>
-              <a:schemeClr val="bg1">
-                <a:lumMod val="85000"/>
-              </a:schemeClr>
-            </a:solidFill>
-          </a:ln>
-        </p:spPr>
-        <p:style>
-          <a:lnRef idx="2">
-            <a:schemeClr val="accent1"/>
-          </a:lnRef>
-          <a:fillRef idx="0">
-            <a:schemeClr val="accent1"/>
-          </a:fillRef>
-          <a:effectRef idx="1">
-            <a:schemeClr val="accent1"/>
-          </a:effectRef>
-          <a:fontRef idx="minor">
-            <a:schemeClr val="tx1"/>
-          </a:fontRef>
-        </p:style>
-      </p:cxnSp>
-      <p:sp>
-        <p:nvSpPr>
-          <p:cNvPr id="2071" name="Rectangle 23">
-            <a:extLst>
-              <a:ext uri="{FF2B5EF4-FFF2-40B4-BE49-F238E27FC236}">
-                <a16:creationId xmlns:a16="http://schemas.microsoft.com/office/drawing/2014/main" id="{66D61E08-70C3-48D8-BEA0-787111DC30DA}"/>
-              </a:ext>
-              <a:ext uri="{C183D7F6-B498-43B3-948B-1728B52AA6E4}">
-                <adec:decorative xmlns:adec="http://schemas.microsoft.com/office/drawing/2017/decorative" val="1"/>
-              </a:ext>
-            </a:extLst>
-          </p:cNvPr>
-          <p:cNvSpPr>
-            <a:spLocks noGrp="1" noRot="1" noChangeAspect="1" noMove="1" noResize="1" noEditPoints="1" noAdjustHandles="1" noChangeArrowheads="1" noChangeShapeType="1" noTextEdit="1"/>
-          </p:cNvSpPr>
-          <p:nvPr>
-            <p:extLst>
-              <p:ext uri="{386F3935-93C4-4BCD-93E2-E3B085C9AB24}">
-                <p16:designElem xmlns:p16="http://schemas.microsoft.com/office/powerpoint/2015/main" val="1"/>
-              </p:ext>
-            </p:extLst>
-          </p:nvPr>
-        </p:nvSpPr>
-        <p:spPr>
-          <a:xfrm>
-            <a:off x="9181476" y="-8467"/>
-            <a:ext cx="3007349" cy="6866467"/>
-          </a:xfrm>
-          <a:custGeom>
-            <a:avLst/>
-            <a:gdLst/>
-            <a:ahLst/>
-            <a:cxnLst/>
-            <a:rect l="l" t="t" r="r" b="b"/>
-            <a:pathLst>
-              <a:path w="3007349" h="6866467">
-                <a:moveTo>
-                  <a:pt x="2045532" y="0"/>
-                </a:moveTo>
-                <a:lnTo>
-                  <a:pt x="3007349" y="0"/>
-                </a:lnTo>
-                <a:lnTo>
-                  <a:pt x="3007349" y="6866467"/>
-                </a:lnTo>
-                <a:lnTo>
-                  <a:pt x="0" y="6866467"/>
-                </a:lnTo>
-                <a:lnTo>
-                  <a:pt x="2045532" y="0"/>
-                </a:lnTo>
-                <a:close/>
-              </a:path>
-            </a:pathLst>
-          </a:custGeom>
-          <a:solidFill>
-            <a:schemeClr val="accent1">
-              <a:alpha val="30000"/>
-            </a:schemeClr>
-          </a:solidFill>
-          <a:ln>
-            <a:noFill/>
-          </a:ln>
-          <a:effectLst/>
-        </p:spPr>
-        <p:style>
-          <a:lnRef idx="1">
-            <a:schemeClr val="accent1"/>
-          </a:lnRef>
-          <a:fillRef idx="3">
-            <a:schemeClr val="accent1"/>
-          </a:fillRef>
-          <a:effectRef idx="2">
-            <a:schemeClr val="accent1"/>
-          </a:effectRef>
-          <a:fontRef idx="minor">
-            <a:schemeClr val="lt1"/>
-          </a:fontRef>
-        </p:style>
-      </p:sp>
-      <p:sp>
-        <p:nvSpPr>
-          <p:cNvPr id="2073" name="Rectangle 25">
-            <a:extLst>
-              <a:ext uri="{FF2B5EF4-FFF2-40B4-BE49-F238E27FC236}">
-                <a16:creationId xmlns:a16="http://schemas.microsoft.com/office/drawing/2014/main" id="{FC55298F-0AE5-478E-AD2B-03C2614C5833}"/>
-              </a:ext>
-              <a:ext uri="{C183D7F6-B498-43B3-948B-1728B52AA6E4}">
-                <adec:decorative xmlns:adec="http://schemas.microsoft.com/office/drawing/2017/decorative" val="1"/>
-              </a:ext>
-            </a:extLst>
-          </p:cNvPr>
-          <p:cNvSpPr>
-            <a:spLocks noGrp="1" noRot="1" noChangeAspect="1" noMove="1" noResize="1" noEditPoints="1" noAdjustHandles="1" noChangeArrowheads="1" noChangeShapeType="1" noTextEdit="1"/>
-          </p:cNvSpPr>
-          <p:nvPr>
-            <p:extLst>
-              <p:ext uri="{386F3935-93C4-4BCD-93E2-E3B085C9AB24}">
-                <p16:designElem xmlns:p16="http://schemas.microsoft.com/office/powerpoint/2015/main" val="1"/>
-              </p:ext>
-            </p:extLst>
-          </p:nvPr>
-        </p:nvSpPr>
-        <p:spPr>
-          <a:xfrm>
-            <a:off x="9603442" y="-8467"/>
-            <a:ext cx="2588558" cy="6866467"/>
-          </a:xfrm>
-          <a:custGeom>
-            <a:avLst/>
-            <a:gdLst/>
-            <a:ahLst/>
-            <a:cxnLst/>
-            <a:rect l="l" t="t" r="r" b="b"/>
-            <a:pathLst>
-              <a:path w="2573311" h="6866467">
-                <a:moveTo>
-                  <a:pt x="0" y="0"/>
-                </a:moveTo>
-                <a:lnTo>
-                  <a:pt x="2573311" y="0"/>
-                </a:lnTo>
-                <a:lnTo>
-                  <a:pt x="2573311" y="6866467"/>
-                </a:lnTo>
-                <a:lnTo>
-                  <a:pt x="1202336" y="6866467"/>
-                </a:lnTo>
-                <a:lnTo>
-                  <a:pt x="0" y="0"/>
-                </a:lnTo>
-                <a:close/>
-              </a:path>
-            </a:pathLst>
-          </a:custGeom>
-          <a:solidFill>
-            <a:schemeClr val="accent1">
-              <a:alpha val="20000"/>
-            </a:schemeClr>
-          </a:solidFill>
-          <a:ln>
-            <a:noFill/>
-          </a:ln>
-          <a:effectLst/>
-        </p:spPr>
-        <p:style>
-          <a:lnRef idx="1">
-            <a:schemeClr val="accent1"/>
-          </a:lnRef>
-          <a:fillRef idx="3">
-            <a:schemeClr val="accent1"/>
-          </a:fillRef>
-          <a:effectRef idx="2">
-            <a:schemeClr val="accent1"/>
-          </a:effectRef>
-          <a:fontRef idx="minor">
-            <a:schemeClr val="lt1"/>
-          </a:fontRef>
-        </p:style>
-      </p:sp>
-      <p:sp>
-        <p:nvSpPr>
-          <p:cNvPr id="2075" name="Isosceles Triangle 24">
-            <a:extLst>
-              <a:ext uri="{FF2B5EF4-FFF2-40B4-BE49-F238E27FC236}">
-                <a16:creationId xmlns:a16="http://schemas.microsoft.com/office/drawing/2014/main" id="{C180E4EA-0B63-4779-A895-7E90E71088F3}"/>
-              </a:ext>
-              <a:ext uri="{C183D7F6-B498-43B3-948B-1728B52AA6E4}">
-                <adec:decorative xmlns:adec="http://schemas.microsoft.com/office/drawing/2017/decorative" val="1"/>
-              </a:ext>
-            </a:extLst>
-          </p:cNvPr>
-          <p:cNvSpPr>
-            <a:spLocks noGrp="1" noRot="1" noChangeAspect="1" noMove="1" noResize="1" noEditPoints="1" noAdjustHandles="1" noChangeArrowheads="1" noChangeShapeType="1" noTextEdit="1"/>
-          </p:cNvSpPr>
-          <p:nvPr>
-            <p:extLst>
-              <p:ext uri="{386F3935-93C4-4BCD-93E2-E3B085C9AB24}">
-                <p16:designElem xmlns:p16="http://schemas.microsoft.com/office/powerpoint/2015/main" val="1"/>
-              </p:ext>
-            </p:extLst>
-          </p:nvPr>
-        </p:nvSpPr>
-        <p:spPr>
-          <a:xfrm>
-            <a:off x="8932333" y="3048000"/>
-            <a:ext cx="3259667" cy="3810000"/>
-          </a:xfrm>
-          <a:prstGeom prst="triangle">
-            <a:avLst>
-              <a:gd name="adj" fmla="val 100000"/>
-            </a:avLst>
-          </a:prstGeom>
-          <a:solidFill>
-            <a:schemeClr val="accent2">
-              <a:alpha val="72000"/>
-            </a:schemeClr>
-          </a:solidFill>
-          <a:ln>
-            <a:noFill/>
-          </a:ln>
-          <a:effectLst/>
-        </p:spPr>
-        <p:style>
-          <a:lnRef idx="1">
-            <a:schemeClr val="accent1"/>
-          </a:lnRef>
-          <a:fillRef idx="3">
-            <a:schemeClr val="accent1"/>
-          </a:fillRef>
-          <a:effectRef idx="2">
-            <a:schemeClr val="accent1"/>
-          </a:effectRef>
-          <a:fontRef idx="minor">
-            <a:schemeClr val="lt1"/>
-          </a:fontRef>
-        </p:style>
-      </p:sp>
-      <p:sp>
-        <p:nvSpPr>
-          <p:cNvPr id="2077" name="Rectangle 27">
-            <a:extLst>
-              <a:ext uri="{FF2B5EF4-FFF2-40B4-BE49-F238E27FC236}">
-                <a16:creationId xmlns:a16="http://schemas.microsoft.com/office/drawing/2014/main" id="{CEE01D9D-3DE8-4EED-B0D3-8F3C79CC7673}"/>
-              </a:ext>
-              <a:ext uri="{C183D7F6-B498-43B3-948B-1728B52AA6E4}">
-                <adec:decorative xmlns:adec="http://schemas.microsoft.com/office/drawing/2017/decorative" val="1"/>
-              </a:ext>
-            </a:extLst>
-          </p:cNvPr>
-          <p:cNvSpPr>
-            <a:spLocks noGrp="1" noRot="1" noChangeAspect="1" noMove="1" noResize="1" noEditPoints="1" noAdjustHandles="1" noChangeArrowheads="1" noChangeShapeType="1" noTextEdit="1"/>
-          </p:cNvSpPr>
-          <p:nvPr>
-            <p:extLst>
-              <p:ext uri="{386F3935-93C4-4BCD-93E2-E3B085C9AB24}">
-                <p16:designElem xmlns:p16="http://schemas.microsoft.com/office/powerpoint/2015/main" val="1"/>
-              </p:ext>
-            </p:extLst>
-          </p:nvPr>
-        </p:nvSpPr>
-        <p:spPr>
-          <a:xfrm>
-            <a:off x="9334500" y="-8467"/>
-            <a:ext cx="2854326" cy="6866467"/>
-          </a:xfrm>
-          <a:custGeom>
-            <a:avLst/>
-            <a:gdLst/>
-            <a:ahLst/>
-            <a:cxnLst/>
-            <a:rect l="l" t="t" r="r" b="b"/>
-            <a:pathLst>
-              <a:path w="2858013" h="6866467">
-                <a:moveTo>
-                  <a:pt x="0" y="0"/>
-                </a:moveTo>
-                <a:lnTo>
-                  <a:pt x="2858013" y="0"/>
-                </a:lnTo>
-                <a:lnTo>
-                  <a:pt x="2858013" y="6866467"/>
-                </a:lnTo>
-                <a:lnTo>
-                  <a:pt x="2473942" y="6866467"/>
-                </a:lnTo>
-                <a:lnTo>
-                  <a:pt x="0" y="0"/>
-                </a:lnTo>
-                <a:close/>
-              </a:path>
-            </a:pathLst>
-          </a:custGeom>
-          <a:solidFill>
-            <a:schemeClr val="accent2">
-              <a:lumMod val="75000"/>
-              <a:alpha val="47000"/>
-            </a:schemeClr>
-          </a:solidFill>
-          <a:ln>
-            <a:noFill/>
-          </a:ln>
-          <a:effectLst/>
-        </p:spPr>
-        <p:style>
-          <a:lnRef idx="1">
-            <a:schemeClr val="accent1"/>
-          </a:lnRef>
-          <a:fillRef idx="3">
-            <a:schemeClr val="accent1"/>
-          </a:fillRef>
-          <a:effectRef idx="2">
-            <a:schemeClr val="accent1"/>
-          </a:effectRef>
-          <a:fontRef idx="minor">
-            <a:schemeClr val="lt1"/>
-          </a:fontRef>
-        </p:style>
-      </p:sp>
-      <p:sp>
-        <p:nvSpPr>
-          <p:cNvPr id="2079" name="Rectangle 28">
-            <a:extLst>
-              <a:ext uri="{FF2B5EF4-FFF2-40B4-BE49-F238E27FC236}">
-                <a16:creationId xmlns:a16="http://schemas.microsoft.com/office/drawing/2014/main" id="{89AF5CE9-607F-43F4-8983-DCD6DA4051FD}"/>
-              </a:ext>
-              <a:ext uri="{C183D7F6-B498-43B3-948B-1728B52AA6E4}">
-                <adec:decorative xmlns:adec="http://schemas.microsoft.com/office/drawing/2017/decorative" val="1"/>
-              </a:ext>
-            </a:extLst>
-          </p:cNvPr>
-          <p:cNvSpPr>
-            <a:spLocks noGrp="1" noRot="1" noChangeAspect="1" noMove="1" noResize="1" noEditPoints="1" noAdjustHandles="1" noChangeArrowheads="1" noChangeShapeType="1" noTextEdit="1"/>
-          </p:cNvSpPr>
-          <p:nvPr>
-            <p:extLst>
-              <p:ext uri="{386F3935-93C4-4BCD-93E2-E3B085C9AB24}">
-                <p16:designElem xmlns:p16="http://schemas.microsoft.com/office/powerpoint/2015/main" val="1"/>
-              </p:ext>
-            </p:extLst>
-          </p:nvPr>
-        </p:nvSpPr>
-        <p:spPr>
-          <a:xfrm>
-            <a:off x="10898730" y="-8467"/>
-            <a:ext cx="1290094" cy="6866467"/>
-          </a:xfrm>
-          <a:custGeom>
-            <a:avLst/>
-            <a:gdLst/>
-            <a:ahLst/>
-            <a:cxnLst/>
-            <a:rect l="l" t="t" r="r" b="b"/>
-            <a:pathLst>
-              <a:path w="1290094" h="6858000">
-                <a:moveTo>
-                  <a:pt x="1019735" y="0"/>
-                </a:moveTo>
-                <a:lnTo>
-                  <a:pt x="1290094" y="0"/>
-                </a:lnTo>
-                <a:lnTo>
-                  <a:pt x="1290094" y="6858000"/>
-                </a:lnTo>
-                <a:lnTo>
-                  <a:pt x="0" y="6858000"/>
-                </a:lnTo>
-                <a:lnTo>
-                  <a:pt x="1019735" y="0"/>
-                </a:lnTo>
-                <a:close/>
-              </a:path>
-            </a:pathLst>
-          </a:custGeom>
-          <a:solidFill>
-            <a:schemeClr val="accent1">
-              <a:lumMod val="60000"/>
-              <a:lumOff val="40000"/>
-              <a:alpha val="70000"/>
-            </a:schemeClr>
-          </a:solidFill>
-          <a:ln>
-            <a:noFill/>
-          </a:ln>
-          <a:effectLst/>
-        </p:spPr>
-        <p:style>
-          <a:lnRef idx="1">
-            <a:schemeClr val="accent1"/>
-          </a:lnRef>
-          <a:fillRef idx="3">
-            <a:schemeClr val="accent1"/>
-          </a:fillRef>
-          <a:effectRef idx="2">
-            <a:schemeClr val="accent1"/>
-          </a:effectRef>
-          <a:fontRef idx="minor">
-            <a:schemeClr val="lt1"/>
-          </a:fontRef>
-        </p:style>
-      </p:sp>
-      <p:sp>
-        <p:nvSpPr>
-          <p:cNvPr id="2081" name="Rectangle 29">
-            <a:extLst>
-              <a:ext uri="{FF2B5EF4-FFF2-40B4-BE49-F238E27FC236}">
-                <a16:creationId xmlns:a16="http://schemas.microsoft.com/office/drawing/2014/main" id="{6EEA2DBD-9E1E-4521-8C01-F32AD18A89E3}"/>
-              </a:ext>
-              <a:ext uri="{C183D7F6-B498-43B3-948B-1728B52AA6E4}">
-                <adec:decorative xmlns:adec="http://schemas.microsoft.com/office/drawing/2017/decorative" val="1"/>
-              </a:ext>
-            </a:extLst>
-          </p:cNvPr>
-          <p:cNvSpPr>
-            <a:spLocks noGrp="1" noRot="1" noChangeAspect="1" noMove="1" noResize="1" noEditPoints="1" noAdjustHandles="1" noChangeArrowheads="1" noChangeShapeType="1" noTextEdit="1"/>
-          </p:cNvSpPr>
-          <p:nvPr>
-            <p:extLst>
-              <p:ext uri="{386F3935-93C4-4BCD-93E2-E3B085C9AB24}">
-                <p16:designElem xmlns:p16="http://schemas.microsoft.com/office/powerpoint/2015/main" val="1"/>
-              </p:ext>
-            </p:extLst>
-          </p:nvPr>
-        </p:nvSpPr>
-        <p:spPr>
-          <a:xfrm>
-            <a:off x="10938999" y="-8467"/>
-            <a:ext cx="1249825" cy="6866467"/>
-          </a:xfrm>
-          <a:custGeom>
-            <a:avLst/>
-            <a:gdLst/>
-            <a:ahLst/>
-            <a:cxnLst/>
-            <a:rect l="l" t="t" r="r" b="b"/>
-            <a:pathLst>
-              <a:path w="1249825" h="6858000">
-                <a:moveTo>
-                  <a:pt x="0" y="0"/>
-                </a:moveTo>
-                <a:lnTo>
-                  <a:pt x="1249825" y="0"/>
-                </a:lnTo>
-                <a:lnTo>
-                  <a:pt x="1249825" y="6858000"/>
-                </a:lnTo>
-                <a:lnTo>
-                  <a:pt x="1109382" y="6858000"/>
-                </a:lnTo>
-                <a:lnTo>
-                  <a:pt x="0" y="0"/>
-                </a:lnTo>
-                <a:close/>
-              </a:path>
-            </a:pathLst>
-          </a:custGeom>
-          <a:solidFill>
-            <a:schemeClr val="accent1">
-              <a:alpha val="65000"/>
-            </a:schemeClr>
-          </a:solidFill>
-          <a:ln>
-            <a:noFill/>
-          </a:ln>
-          <a:effectLst/>
-        </p:spPr>
-        <p:style>
-          <a:lnRef idx="1">
-            <a:schemeClr val="accent1"/>
-          </a:lnRef>
-          <a:fillRef idx="3">
-            <a:schemeClr val="accent1"/>
-          </a:fillRef>
-          <a:effectRef idx="2">
-            <a:schemeClr val="accent1"/>
-          </a:effectRef>
-          <a:fontRef idx="minor">
-            <a:schemeClr val="lt1"/>
-          </a:fontRef>
-        </p:style>
-      </p:sp>
-      <p:sp>
-        <p:nvSpPr>
-          <p:cNvPr id="2083" name="Isosceles Triangle 29">
-            <a:extLst>
-              <a:ext uri="{FF2B5EF4-FFF2-40B4-BE49-F238E27FC236}">
-                <a16:creationId xmlns:a16="http://schemas.microsoft.com/office/drawing/2014/main" id="{15BBD2C1-BA9B-46A9-A27A-33498B169272}"/>
-              </a:ext>
-              <a:ext uri="{C183D7F6-B498-43B3-948B-1728B52AA6E4}">
-                <adec:decorative xmlns:adec="http://schemas.microsoft.com/office/drawing/2017/decorative" val="1"/>
-              </a:ext>
-            </a:extLst>
-          </p:cNvPr>
-          <p:cNvSpPr>
-            <a:spLocks noGrp="1" noRot="1" noChangeAspect="1" noMove="1" noResize="1" noEditPoints="1" noAdjustHandles="1" noChangeArrowheads="1" noChangeShapeType="1" noTextEdit="1"/>
-          </p:cNvSpPr>
-          <p:nvPr>
-            <p:extLst>
-              <p:ext uri="{386F3935-93C4-4BCD-93E2-E3B085C9AB24}">
-                <p16:designElem xmlns:p16="http://schemas.microsoft.com/office/powerpoint/2015/main" val="1"/>
-              </p:ext>
-            </p:extLst>
-          </p:nvPr>
-        </p:nvSpPr>
-        <p:spPr>
-          <a:xfrm>
-            <a:off x="10371666" y="3589867"/>
-            <a:ext cx="1817159" cy="3268133"/>
-          </a:xfrm>
-          <a:prstGeom prst="triangle">
-            <a:avLst>
-              <a:gd name="adj" fmla="val 100000"/>
-            </a:avLst>
-          </a:prstGeom>
-          <a:solidFill>
-            <a:schemeClr val="accent1">
-              <a:alpha val="80000"/>
-            </a:schemeClr>
-          </a:solidFill>
-          <a:ln>
-            <a:noFill/>
-          </a:ln>
-          <a:effectLst/>
-        </p:spPr>
-        <p:style>
-          <a:lnRef idx="1">
-            <a:schemeClr val="accent1"/>
-          </a:lnRef>
-          <a:fillRef idx="3">
-            <a:schemeClr val="accent1"/>
-          </a:fillRef>
-          <a:effectRef idx="2">
-            <a:schemeClr val="accent1"/>
-          </a:effectRef>
-          <a:fontRef idx="minor">
-            <a:schemeClr val="lt1"/>
-          </a:fontRef>
-        </p:style>
-      </p:sp>
-    </p:spTree>
-    <p:extLst>
-      <p:ext uri="{BB962C8B-B14F-4D97-AF65-F5344CB8AC3E}">
-        <p14:creationId xmlns:p14="http://schemas.microsoft.com/office/powerpoint/2010/main" val="2185680157"/>
-      </p:ext>
-    </p:extLst>
-  </p:cSld>
-  <p:clrMapOvr>
-    <a:masterClrMapping/>
-  </p:clrMapOvr>
-</p:sld>
-</file>
-
-<file path=ppt/slides/slide7.xml><?xml version="1.0" encoding="utf-8"?>
-<p:sld xmlns:a="http://schemas.openxmlformats.org/drawingml/2006/main" xmlns:r="http://schemas.openxmlformats.org/officeDocument/2006/relationships" xmlns:p="http://schemas.openxmlformats.org/presentationml/2006/main">
-  <p:cSld>
     <p:spTree>
       <p:nvGrpSpPr>
         <p:cNvPr id="1" name=""/>
@@ -27480,7 +27256,7 @@
 </p:sld>
 </file>
 
-<file path=ppt/slides/slide8.xml><?xml version="1.0" encoding="utf-8"?>
+<file path=ppt/slides/slide7.xml><?xml version="1.0" encoding="utf-8"?>
 <p:sld xmlns:a="http://schemas.openxmlformats.org/drawingml/2006/main" xmlns:r="http://schemas.openxmlformats.org/officeDocument/2006/relationships" xmlns:p="http://schemas.openxmlformats.org/presentationml/2006/main">
   <p:cSld>
     <p:bg>
@@ -27919,7 +27695,7 @@
 </p:sld>
 </file>
 
-<file path=ppt/slides/slide9.xml><?xml version="1.0" encoding="utf-8"?>
+<file path=ppt/slides/slide8.xml><?xml version="1.0" encoding="utf-8"?>
 <p:sld xmlns:a="http://schemas.openxmlformats.org/drawingml/2006/main" xmlns:r="http://schemas.openxmlformats.org/officeDocument/2006/relationships" xmlns:p="http://schemas.openxmlformats.org/presentationml/2006/main">
   <p:cSld>
     <p:bg>
@@ -28856,6 +28632,237 @@
 </p:sld>
 </file>
 
+<file path=ppt/slides/slide9.xml><?xml version="1.0" encoding="utf-8"?>
+<p:sld xmlns:a="http://schemas.openxmlformats.org/drawingml/2006/main" xmlns:r="http://schemas.openxmlformats.org/officeDocument/2006/relationships" xmlns:p="http://schemas.openxmlformats.org/presentationml/2006/main">
+  <p:cSld>
+    <p:bg>
+      <p:bgPr>
+        <a:solidFill>
+          <a:schemeClr val="bg1"/>
+        </a:solidFill>
+        <a:effectLst/>
+      </p:bgPr>
+    </p:bg>
+    <p:spTree>
+      <p:nvGrpSpPr>
+        <p:cNvPr id="1" name=""/>
+        <p:cNvGrpSpPr/>
+        <p:nvPr/>
+      </p:nvGrpSpPr>
+      <p:grpSpPr>
+        <a:xfrm>
+          <a:off x="0" y="0"/>
+          <a:ext cx="0" cy="0"/>
+          <a:chOff x="0" y="0"/>
+          <a:chExt cx="0" cy="0"/>
+        </a:xfrm>
+      </p:grpSpPr>
+      <p:cxnSp>
+        <p:nvCxnSpPr>
+          <p:cNvPr id="7" name="Straight Connector 7">
+            <a:extLst>
+              <a:ext uri="{FF2B5EF4-FFF2-40B4-BE49-F238E27FC236}">
+                <a16:creationId xmlns:a16="http://schemas.microsoft.com/office/drawing/2014/main" id="{0B5F7E3B-C5F1-40E0-A491-558BAFBC1127}"/>
+              </a:ext>
+              <a:ext uri="{C183D7F6-B498-43B3-948B-1728B52AA6E4}">
+                <adec:decorative xmlns:adec="http://schemas.microsoft.com/office/drawing/2017/decorative" val="1"/>
+              </a:ext>
+            </a:extLst>
+          </p:cNvPr>
+          <p:cNvCxnSpPr>
+            <a:cxnSpLocks noGrp="1" noRot="1" noChangeAspect="1" noMove="1" noResize="1" noEditPoints="1" noAdjustHandles="1" noChangeArrowheads="1" noChangeShapeType="1"/>
+          </p:cNvCxnSpPr>
+          <p:nvPr>
+            <p:extLst>
+              <p:ext uri="{386F3935-93C4-4BCD-93E2-E3B085C9AB24}">
+                <p16:designElem xmlns:p16="http://schemas.microsoft.com/office/powerpoint/2015/main" val="1"/>
+              </p:ext>
+            </p:extLst>
+          </p:nvPr>
+        </p:nvCxnSpPr>
+        <p:spPr>
+          <a:xfrm>
+            <a:off x="4241804" y="1460500"/>
+            <a:ext cx="0" cy="3937000"/>
+          </a:xfrm>
+          <a:prstGeom prst="line">
+            <a:avLst/>
+          </a:prstGeom>
+        </p:spPr>
+        <p:style>
+          <a:lnRef idx="1">
+            <a:schemeClr val="accent1"/>
+          </a:lnRef>
+          <a:fillRef idx="0">
+            <a:schemeClr val="accent1"/>
+          </a:fillRef>
+          <a:effectRef idx="0">
+            <a:schemeClr val="accent1"/>
+          </a:effectRef>
+          <a:fontRef idx="minor">
+            <a:schemeClr val="tx1"/>
+          </a:fontRef>
+        </p:style>
+      </p:cxnSp>
+      <p:sp>
+        <p:nvSpPr>
+          <p:cNvPr id="2" name="Title 1">
+            <a:extLst>
+              <a:ext uri="{FF2B5EF4-FFF2-40B4-BE49-F238E27FC236}">
+                <a16:creationId xmlns:a16="http://schemas.microsoft.com/office/drawing/2014/main" id="{C0798C81-2215-EF97-F327-23A295E10C9A}"/>
+              </a:ext>
+            </a:extLst>
+          </p:cNvPr>
+          <p:cNvSpPr>
+            <a:spLocks noGrp="1"/>
+          </p:cNvSpPr>
+          <p:nvPr>
+            <p:ph type="title"/>
+          </p:nvPr>
+        </p:nvSpPr>
+        <p:spPr>
+          <a:xfrm>
+            <a:off x="643467" y="816638"/>
+            <a:ext cx="3367359" cy="5224724"/>
+          </a:xfrm>
+        </p:spPr>
+        <p:txBody>
+          <a:bodyPr anchor="ctr">
+            <a:normAutofit/>
+          </a:bodyPr>
+          <a:lstStyle/>
+          <a:p>
+            <a:r>
+              <a:rPr lang="pl-PL" dirty="0"/>
+              <a:t>Kilka pojęć – Peer </a:t>
+            </a:r>
+            <a:r>
+              <a:rPr lang="pl-PL" dirty="0" err="1"/>
+              <a:t>review</a:t>
+            </a:r>
+            <a:endParaRPr lang="en-GB" dirty="0"/>
+          </a:p>
+        </p:txBody>
+      </p:sp>
+      <p:sp>
+        <p:nvSpPr>
+          <p:cNvPr id="3" name="Content Placeholder 2">
+            <a:extLst>
+              <a:ext uri="{FF2B5EF4-FFF2-40B4-BE49-F238E27FC236}">
+                <a16:creationId xmlns:a16="http://schemas.microsoft.com/office/drawing/2014/main" id="{954F91D3-AD00-F500-F17B-145463EC10E8}"/>
+              </a:ext>
+            </a:extLst>
+          </p:cNvPr>
+          <p:cNvSpPr>
+            <a:spLocks noGrp="1"/>
+          </p:cNvSpPr>
+          <p:nvPr>
+            <p:ph idx="1"/>
+          </p:nvPr>
+        </p:nvSpPr>
+        <p:spPr>
+          <a:xfrm>
+            <a:off x="4654295" y="816638"/>
+            <a:ext cx="4619706" cy="5224724"/>
+          </a:xfrm>
+        </p:spPr>
+        <p:txBody>
+          <a:bodyPr anchor="ctr">
+            <a:normAutofit/>
+          </a:bodyPr>
+          <a:lstStyle/>
+          <a:p>
+            <a:r>
+              <a:rPr lang="pl-PL" dirty="0"/>
+              <a:t>To proces recenzji </a:t>
+            </a:r>
+            <a:r>
+              <a:rPr lang="pl-PL" i="1" dirty="0" err="1"/>
+              <a:t>Working</a:t>
+            </a:r>
+            <a:r>
+              <a:rPr lang="pl-PL" i="1" dirty="0"/>
+              <a:t> Paper</a:t>
+            </a:r>
+          </a:p>
+          <a:p>
+            <a:pPr lvl="1"/>
+            <a:r>
+              <a:rPr lang="pl-PL" dirty="0"/>
+              <a:t>Badanie oceniane przez 2-3 osoby </a:t>
+            </a:r>
+          </a:p>
+          <a:p>
+            <a:pPr lvl="1"/>
+            <a:r>
+              <a:rPr lang="pl-PL" dirty="0"/>
+              <a:t>Oceniający są anonimowi, autor nie.</a:t>
+            </a:r>
+          </a:p>
+          <a:p>
+            <a:pPr lvl="1"/>
+            <a:endParaRPr lang="pl-PL" dirty="0"/>
+          </a:p>
+          <a:p>
+            <a:r>
+              <a:rPr lang="pl-PL" dirty="0"/>
+              <a:t> Ciekawe teksty (ang.):</a:t>
+            </a:r>
+          </a:p>
+          <a:p>
+            <a:pPr lvl="1"/>
+            <a:r>
+              <a:rPr lang="pl-PL" dirty="0">
+                <a:hlinkClick r:id="rId2"/>
+              </a:rPr>
+              <a:t>Publishing as a </a:t>
+            </a:r>
+            <a:r>
+              <a:rPr lang="pl-PL" dirty="0" err="1">
+                <a:hlinkClick r:id="rId2"/>
+              </a:rPr>
+              <a:t>prostitution</a:t>
+            </a:r>
+            <a:r>
+              <a:rPr lang="pl-PL" dirty="0"/>
+              <a:t> – dużo o różnych bodźcach motywacyjnych</a:t>
+            </a:r>
+          </a:p>
+          <a:p>
+            <a:pPr lvl="1"/>
+            <a:r>
+              <a:rPr lang="pl-PL" dirty="0" err="1"/>
+              <a:t>Affiliation</a:t>
+            </a:r>
+            <a:r>
+              <a:rPr lang="pl-PL" dirty="0"/>
+              <a:t> </a:t>
+            </a:r>
+            <a:r>
+              <a:rPr lang="pl-PL" dirty="0" err="1"/>
+              <a:t>matters</a:t>
+            </a:r>
+            <a:r>
+              <a:rPr lang="pl-PL" dirty="0"/>
+              <a:t> – prestiżowy uniwersytet dużo znaczy. </a:t>
+            </a:r>
+            <a:endParaRPr lang="en-GB" dirty="0"/>
+          </a:p>
+        </p:txBody>
+      </p:sp>
+    </p:spTree>
+    <p:extLst>
+      <p:ext uri="{BB962C8B-B14F-4D97-AF65-F5344CB8AC3E}">
+        <p14:creationId xmlns:p14="http://schemas.microsoft.com/office/powerpoint/2010/main" val="3161942473"/>
+      </p:ext>
+    </p:extLst>
+  </p:cSld>
+  <p:clrMapOvr>
+    <a:masterClrMapping/>
+  </p:clrMapOvr>
+</p:sld>
+</file>
+
 <file path=ppt/theme/theme1.xml><?xml version="1.0" encoding="utf-8"?>
 <a:theme xmlns:a="http://schemas.openxmlformats.org/drawingml/2006/main" name="Facet">
   <a:themeElements>
